--- a/dist/초1/수학/시간과규칙/초1_수학_시간과규칙_01_몇시와몇시30분.pptx
+++ b/dist/초1/수학/시간과규칙/초1_수학_시간과규칙_01_몇시와몇시30분.pptx
@@ -122,13 +122,13 @@
   <p:extLst>
     <p:ext uri="{521415D9-36F7-43E2-AB2F-B90AF26B5E84}">
       <p14:sectionLst xmlns:p14="http://schemas.microsoft.com/office/powerpoint/2010/main">
-        <p14:section name="도입" id="{38bc841d-6bf2-60af-bfb2-81d7fe2e1723}">
+        <p14:section name="도입" id="{e526e992-cd13-44e1-1c40-b5d8831c0e33}">
           <p14:sldIdLst>
             <p14:sldId id="256"/>
             <p14:sldId id="257"/>
           </p14:sldIdLst>
         </p14:section>
-        <p14:section name="개념" id="{37c9bf4b-768c-631f-402e-c7ee4e034b4c}">
+        <p14:section name="개념" id="{9989e8cf-78eb-93a9-b1df-0ee12a04a519}">
           <p14:sldIdLst>
             <p14:sldId id="258"/>
             <p14:sldId id="259"/>
@@ -138,32 +138,32 @@
             <p14:sldId id="264"/>
           </p14:sldIdLst>
         </p14:section>
-        <p14:section name="연습" id="{59f7cdd5-c43b-9469-03cc-62c0470775c2}">
+        <p14:section name="연습" id="{a913cb27-f0e2-0330-4517-ea1aa7e44d8e}">
           <p14:sldIdLst>
             <p14:sldId id="261"/>
             <p14:sldId id="265"/>
             <p14:sldId id="266"/>
           </p14:sldIdLst>
         </p14:section>
-        <p14:section name="개념" id="{df219729-7523-b9ee-a575-cb08d65fc49e}">
+        <p14:section name="개념" id="{fda562f1-bddc-8c1e-23be-a7c3fb85b5cb}">
           <p14:sldIdLst/>
         </p14:section>
-        <p14:section name="연습" id="{706ef49f-b2ec-7d35-c861-258094e7a04c}">
+        <p14:section name="연습" id="{628ae769-c75e-e0a1-6079-ad151084f946}">
           <p14:sldIdLst/>
         </p14:section>
-        <p14:section name="확인" id="{c7dad93a-afea-48f8-5e38-d20ace40f9e7}">
+        <p14:section name="확인" id="{06d6ffeb-2f5f-c6d9-1966-b2c57370cb90}">
           <p14:sldIdLst>
             <p14:sldId id="267"/>
             <p14:sldId id="268"/>
             <p14:sldId id="269"/>
           </p14:sldIdLst>
         </p14:section>
-        <p14:section name="정리" id="{a0a1016b-8e86-7176-0cc7-0e26f66ea9ba}">
+        <p14:section name="정리" id="{14ae2dca-9272-8dfd-f957-e8dd2567c565}">
           <p14:sldIdLst>
             <p14:sldId id="270"/>
           </p14:sldIdLst>
         </p14:section>
-        <p14:section name="보충" id="{4c9a4f77-29ac-3ac2-c54a-e372b9315523}">
+        <p14:section name="보충" id="{aec391ef-dcf7-b118-83ea-efece2a88a30}">
           <p14:sldIdLst>
             <p14:sldId id="271"/>
           </p14:sldIdLst>
@@ -4632,7 +4632,7 @@
         </p:nvSpPr>
         <p:spPr>
           <a:xfrm>
-            <a:off x="9913925" y="982638"/>
+            <a:off x="9950501" y="919286"/>
             <a:ext cx="548640" cy="365760"/>
           </a:xfrm>
           <a:prstGeom prst="rect">
@@ -4671,7 +4671,7 @@
         </p:nvSpPr>
         <p:spPr>
           <a:xfrm>
-            <a:off x="10310202" y="1378915"/>
+            <a:off x="10373554" y="1342339"/>
             <a:ext cx="548640" cy="365760"/>
           </a:xfrm>
           <a:prstGeom prst="rect">
@@ -4710,7 +4710,7 @@
         </p:nvSpPr>
         <p:spPr>
           <a:xfrm>
-            <a:off x="10455250" y="1920240"/>
+            <a:off x="10528402" y="1920240"/>
             <a:ext cx="548640" cy="365760"/>
           </a:xfrm>
           <a:prstGeom prst="rect">
@@ -4749,7 +4749,7 @@
         </p:nvSpPr>
         <p:spPr>
           <a:xfrm>
-            <a:off x="10310202" y="2461565"/>
+            <a:off x="10373554" y="2498141"/>
             <a:ext cx="548640" cy="365760"/>
           </a:xfrm>
           <a:prstGeom prst="rect">
@@ -4788,7 +4788,7 @@
         </p:nvSpPr>
         <p:spPr>
           <a:xfrm>
-            <a:off x="9913925" y="2857842"/>
+            <a:off x="9950501" y="2921194"/>
             <a:ext cx="548640" cy="365760"/>
           </a:xfrm>
           <a:prstGeom prst="rect">
@@ -4827,7 +4827,7 @@
         </p:nvSpPr>
         <p:spPr>
           <a:xfrm>
-            <a:off x="9372600" y="3002890"/>
+            <a:off x="9372600" y="3076042"/>
             <a:ext cx="548640" cy="365760"/>
           </a:xfrm>
           <a:prstGeom prst="rect">
@@ -4866,7 +4866,7 @@
         </p:nvSpPr>
         <p:spPr>
           <a:xfrm>
-            <a:off x="8831275" y="2857842"/>
+            <a:off x="8794699" y="2921194"/>
             <a:ext cx="548640" cy="365760"/>
           </a:xfrm>
           <a:prstGeom prst="rect">
@@ -4905,7 +4905,7 @@
         </p:nvSpPr>
         <p:spPr>
           <a:xfrm>
-            <a:off x="8434998" y="2461565"/>
+            <a:off x="8371646" y="2498141"/>
             <a:ext cx="548640" cy="365760"/>
           </a:xfrm>
           <a:prstGeom prst="rect">
@@ -4944,7 +4944,7 @@
         </p:nvSpPr>
         <p:spPr>
           <a:xfrm>
-            <a:off x="8289950" y="1920240"/>
+            <a:off x="8216798" y="1920240"/>
             <a:ext cx="548640" cy="365760"/>
           </a:xfrm>
           <a:prstGeom prst="rect">
@@ -4983,7 +4983,7 @@
         </p:nvSpPr>
         <p:spPr>
           <a:xfrm>
-            <a:off x="8434998" y="1378915"/>
+            <a:off x="8371646" y="1342339"/>
             <a:ext cx="548640" cy="365760"/>
           </a:xfrm>
           <a:prstGeom prst="rect">
@@ -5022,7 +5022,7 @@
         </p:nvSpPr>
         <p:spPr>
           <a:xfrm>
-            <a:off x="8831275" y="982638"/>
+            <a:off x="8794699" y="919286"/>
             <a:ext cx="548640" cy="365760"/>
           </a:xfrm>
           <a:prstGeom prst="rect">
@@ -5061,7 +5061,7 @@
         </p:nvSpPr>
         <p:spPr>
           <a:xfrm>
-            <a:off x="9372600" y="837590"/>
+            <a:off x="9372600" y="764438"/>
             <a:ext cx="548640" cy="365760"/>
           </a:xfrm>
           <a:prstGeom prst="rect">
@@ -5101,7 +5101,7 @@
         <p:spPr>
           <a:xfrm>
             <a:off x="9646920" y="2103120"/>
-            <a:ext cx="731520" cy="0"/>
+            <a:ext cx="643738" cy="0"/>
           </a:xfrm>
           <a:prstGeom prst="line">
             <a:avLst/>
@@ -5123,8 +5123,8 @@
         </p:nvSpPr>
         <p:spPr>
           <a:xfrm flipV="1">
-            <a:off x="9646920" y="961949"/>
-            <a:ext cx="0" cy="1141171"/>
+            <a:off x="9646920" y="1166774"/>
+            <a:ext cx="0" cy="936346"/>
           </a:xfrm>
           <a:prstGeom prst="line">
             <a:avLst/>
@@ -6820,7 +6820,7 @@
         </p:nvSpPr>
         <p:spPr>
           <a:xfrm>
-            <a:off x="2591410" y="1784717"/>
+            <a:off x="2630272" y="1717406"/>
             <a:ext cx="548640" cy="365760"/>
           </a:xfrm>
           <a:prstGeom prst="rect">
@@ -6859,7 +6859,7 @@
         </p:nvSpPr>
         <p:spPr>
           <a:xfrm>
-            <a:off x="3012454" y="2205761"/>
+            <a:off x="3079765" y="2166899"/>
             <a:ext cx="548640" cy="365760"/>
           </a:xfrm>
           <a:prstGeom prst="rect">
@@ -6898,7 +6898,7 @@
         </p:nvSpPr>
         <p:spPr>
           <a:xfrm>
-            <a:off x="3166567" y="2780919"/>
+            <a:off x="3244291" y="2780919"/>
             <a:ext cx="548640" cy="365760"/>
           </a:xfrm>
           <a:prstGeom prst="rect">
@@ -6937,7 +6937,7 @@
         </p:nvSpPr>
         <p:spPr>
           <a:xfrm>
-            <a:off x="3012454" y="3356077"/>
+            <a:off x="3079765" y="3394939"/>
             <a:ext cx="548640" cy="365760"/>
           </a:xfrm>
           <a:prstGeom prst="rect">
@@ -6976,7 +6976,7 @@
         </p:nvSpPr>
         <p:spPr>
           <a:xfrm>
-            <a:off x="2591410" y="3777121"/>
+            <a:off x="2630272" y="3844432"/>
             <a:ext cx="548640" cy="365760"/>
           </a:xfrm>
           <a:prstGeom prst="rect">
@@ -7015,7 +7015,7 @@
         </p:nvSpPr>
         <p:spPr>
           <a:xfrm>
-            <a:off x="2016252" y="3931234"/>
+            <a:off x="2016252" y="4008958"/>
             <a:ext cx="548640" cy="365760"/>
           </a:xfrm>
           <a:prstGeom prst="rect">
@@ -7054,7 +7054,7 @@
         </p:nvSpPr>
         <p:spPr>
           <a:xfrm>
-            <a:off x="1441094" y="3777121"/>
+            <a:off x="1402232" y="3844432"/>
             <a:ext cx="548640" cy="365760"/>
           </a:xfrm>
           <a:prstGeom prst="rect">
@@ -7093,7 +7093,7 @@
         </p:nvSpPr>
         <p:spPr>
           <a:xfrm>
-            <a:off x="1020050" y="3356077"/>
+            <a:off x="952739" y="3394939"/>
             <a:ext cx="548640" cy="365760"/>
           </a:xfrm>
           <a:prstGeom prst="rect">
@@ -7132,7 +7132,7 @@
         </p:nvSpPr>
         <p:spPr>
           <a:xfrm>
-            <a:off x="865937" y="2780919"/>
+            <a:off x="788213" y="2780919"/>
             <a:ext cx="548640" cy="365760"/>
           </a:xfrm>
           <a:prstGeom prst="rect">
@@ -7171,7 +7171,7 @@
         </p:nvSpPr>
         <p:spPr>
           <a:xfrm>
-            <a:off x="1020050" y="2205761"/>
+            <a:off x="952739" y="2166899"/>
             <a:ext cx="548640" cy="365760"/>
           </a:xfrm>
           <a:prstGeom prst="rect">
@@ -7210,7 +7210,7 @@
         </p:nvSpPr>
         <p:spPr>
           <a:xfrm>
-            <a:off x="1441094" y="1784717"/>
+            <a:off x="1402232" y="1717406"/>
             <a:ext cx="548640" cy="365760"/>
           </a:xfrm>
           <a:prstGeom prst="rect">
@@ -7249,7 +7249,7 @@
         </p:nvSpPr>
         <p:spPr>
           <a:xfrm>
-            <a:off x="2016252" y="1630604"/>
+            <a:off x="2016252" y="1552880"/>
             <a:ext cx="548640" cy="365760"/>
           </a:xfrm>
           <a:prstGeom prst="rect">
@@ -7288,8 +7288,8 @@
         </p:nvSpPr>
         <p:spPr>
           <a:xfrm flipV="1">
-            <a:off x="2290572" y="2414207"/>
-            <a:ext cx="549592" cy="549592"/>
+            <a:off x="2290572" y="2480158"/>
+            <a:ext cx="483641" cy="483641"/>
           </a:xfrm>
           <a:prstGeom prst="line">
             <a:avLst/>
@@ -7312,7 +7312,7 @@
         <p:spPr>
           <a:xfrm>
             <a:off x="2290572" y="2963799"/>
-            <a:ext cx="0" cy="1212494"/>
+            <a:ext cx="0" cy="994867"/>
           </a:xfrm>
           <a:prstGeom prst="line">
             <a:avLst/>
@@ -8803,7 +8803,7 @@
         </p:nvSpPr>
         <p:spPr>
           <a:xfrm>
-            <a:off x="6395314" y="1784717"/>
+            <a:off x="6434176" y="1717406"/>
             <a:ext cx="548640" cy="365760"/>
           </a:xfrm>
           <a:prstGeom prst="rect">
@@ -8842,7 +8842,7 @@
         </p:nvSpPr>
         <p:spPr>
           <a:xfrm>
-            <a:off x="6816358" y="2205761"/>
+            <a:off x="6883669" y="2166899"/>
             <a:ext cx="548640" cy="365760"/>
           </a:xfrm>
           <a:prstGeom prst="rect">
@@ -8881,7 +8881,7 @@
         </p:nvSpPr>
         <p:spPr>
           <a:xfrm>
-            <a:off x="6970471" y="2780919"/>
+            <a:off x="7048195" y="2780919"/>
             <a:ext cx="548640" cy="365760"/>
           </a:xfrm>
           <a:prstGeom prst="rect">
@@ -8920,7 +8920,7 @@
         </p:nvSpPr>
         <p:spPr>
           <a:xfrm>
-            <a:off x="6816358" y="3356077"/>
+            <a:off x="6883669" y="3394939"/>
             <a:ext cx="548640" cy="365760"/>
           </a:xfrm>
           <a:prstGeom prst="rect">
@@ -8959,7 +8959,7 @@
         </p:nvSpPr>
         <p:spPr>
           <a:xfrm>
-            <a:off x="6395314" y="3777121"/>
+            <a:off x="6434176" y="3844432"/>
             <a:ext cx="548640" cy="365760"/>
           </a:xfrm>
           <a:prstGeom prst="rect">
@@ -8998,7 +8998,7 @@
         </p:nvSpPr>
         <p:spPr>
           <a:xfrm>
-            <a:off x="5820156" y="3931234"/>
+            <a:off x="5820156" y="4008958"/>
             <a:ext cx="548640" cy="365760"/>
           </a:xfrm>
           <a:prstGeom prst="rect">
@@ -9037,7 +9037,7 @@
         </p:nvSpPr>
         <p:spPr>
           <a:xfrm>
-            <a:off x="5244998" y="3777121"/>
+            <a:off x="5206136" y="3844432"/>
             <a:ext cx="548640" cy="365760"/>
           </a:xfrm>
           <a:prstGeom prst="rect">
@@ -9076,7 +9076,7 @@
         </p:nvSpPr>
         <p:spPr>
           <a:xfrm>
-            <a:off x="4823954" y="3356077"/>
+            <a:off x="4756643" y="3394939"/>
             <a:ext cx="548640" cy="365760"/>
           </a:xfrm>
           <a:prstGeom prst="rect">
@@ -9115,7 +9115,7 @@
         </p:nvSpPr>
         <p:spPr>
           <a:xfrm>
-            <a:off x="4669841" y="2780919"/>
+            <a:off x="4592117" y="2780919"/>
             <a:ext cx="548640" cy="365760"/>
           </a:xfrm>
           <a:prstGeom prst="rect">
@@ -9154,7 +9154,7 @@
         </p:nvSpPr>
         <p:spPr>
           <a:xfrm>
-            <a:off x="4823954" y="2205761"/>
+            <a:off x="4756643" y="2166899"/>
             <a:ext cx="548640" cy="365760"/>
           </a:xfrm>
           <a:prstGeom prst="rect">
@@ -9193,7 +9193,7 @@
         </p:nvSpPr>
         <p:spPr>
           <a:xfrm>
-            <a:off x="5244998" y="1784717"/>
+            <a:off x="5206136" y="1717406"/>
             <a:ext cx="548640" cy="365760"/>
           </a:xfrm>
           <a:prstGeom prst="rect">
@@ -9232,7 +9232,7 @@
         </p:nvSpPr>
         <p:spPr>
           <a:xfrm>
-            <a:off x="5820156" y="1630604"/>
+            <a:off x="5820156" y="1552880"/>
             <a:ext cx="548640" cy="365760"/>
           </a:xfrm>
           <a:prstGeom prst="rect">
@@ -9271,8 +9271,8 @@
         </p:nvSpPr>
         <p:spPr>
           <a:xfrm flipH="1" flipV="1">
-            <a:off x="5544884" y="2414207"/>
-            <a:ext cx="549592" cy="549592"/>
+            <a:off x="5610835" y="2480158"/>
+            <a:ext cx="483641" cy="483641"/>
           </a:xfrm>
           <a:prstGeom prst="line">
             <a:avLst/>
@@ -9295,7 +9295,7 @@
         <p:spPr>
           <a:xfrm>
             <a:off x="6094476" y="2963799"/>
-            <a:ext cx="0" cy="1212494"/>
+            <a:ext cx="0" cy="994867"/>
           </a:xfrm>
           <a:prstGeom prst="line">
             <a:avLst/>
@@ -10786,7 +10786,7 @@
         </p:nvSpPr>
         <p:spPr>
           <a:xfrm>
-            <a:off x="10199218" y="1784717"/>
+            <a:off x="10238080" y="1717406"/>
             <a:ext cx="548640" cy="365760"/>
           </a:xfrm>
           <a:prstGeom prst="rect">
@@ -10825,7 +10825,7 @@
         </p:nvSpPr>
         <p:spPr>
           <a:xfrm>
-            <a:off x="10620262" y="2205761"/>
+            <a:off x="10687573" y="2166899"/>
             <a:ext cx="548640" cy="365760"/>
           </a:xfrm>
           <a:prstGeom prst="rect">
@@ -10864,7 +10864,7 @@
         </p:nvSpPr>
         <p:spPr>
           <a:xfrm>
-            <a:off x="10774375" y="2780919"/>
+            <a:off x="10852099" y="2780919"/>
             <a:ext cx="548640" cy="365760"/>
           </a:xfrm>
           <a:prstGeom prst="rect">
@@ -10903,7 +10903,7 @@
         </p:nvSpPr>
         <p:spPr>
           <a:xfrm>
-            <a:off x="10620262" y="3356077"/>
+            <a:off x="10687573" y="3394939"/>
             <a:ext cx="548640" cy="365760"/>
           </a:xfrm>
           <a:prstGeom prst="rect">
@@ -10942,7 +10942,7 @@
         </p:nvSpPr>
         <p:spPr>
           <a:xfrm>
-            <a:off x="10199218" y="3777121"/>
+            <a:off x="10238080" y="3844432"/>
             <a:ext cx="548640" cy="365760"/>
           </a:xfrm>
           <a:prstGeom prst="rect">
@@ -10981,7 +10981,7 @@
         </p:nvSpPr>
         <p:spPr>
           <a:xfrm>
-            <a:off x="9624060" y="3931234"/>
+            <a:off x="9624060" y="4008958"/>
             <a:ext cx="548640" cy="365760"/>
           </a:xfrm>
           <a:prstGeom prst="rect">
@@ -11020,7 +11020,7 @@
         </p:nvSpPr>
         <p:spPr>
           <a:xfrm>
-            <a:off x="9048902" y="3777121"/>
+            <a:off x="9010040" y="3844432"/>
             <a:ext cx="548640" cy="365760"/>
           </a:xfrm>
           <a:prstGeom prst="rect">
@@ -11059,7 +11059,7 @@
         </p:nvSpPr>
         <p:spPr>
           <a:xfrm>
-            <a:off x="8627858" y="3356077"/>
+            <a:off x="8560547" y="3394939"/>
             <a:ext cx="548640" cy="365760"/>
           </a:xfrm>
           <a:prstGeom prst="rect">
@@ -11098,7 +11098,7 @@
         </p:nvSpPr>
         <p:spPr>
           <a:xfrm>
-            <a:off x="8473745" y="2780919"/>
+            <a:off x="8396021" y="2780919"/>
             <a:ext cx="548640" cy="365760"/>
           </a:xfrm>
           <a:prstGeom prst="rect">
@@ -11137,7 +11137,7 @@
         </p:nvSpPr>
         <p:spPr>
           <a:xfrm>
-            <a:off x="8627858" y="2205761"/>
+            <a:off x="8560547" y="2166899"/>
             <a:ext cx="548640" cy="365760"/>
           </a:xfrm>
           <a:prstGeom prst="rect">
@@ -11176,7 +11176,7 @@
         </p:nvSpPr>
         <p:spPr>
           <a:xfrm>
-            <a:off x="9048902" y="1784717"/>
+            <a:off x="9010040" y="1717406"/>
             <a:ext cx="548640" cy="365760"/>
           </a:xfrm>
           <a:prstGeom prst="rect">
@@ -11215,7 +11215,7 @@
         </p:nvSpPr>
         <p:spPr>
           <a:xfrm>
-            <a:off x="9624060" y="1630604"/>
+            <a:off x="9624060" y="1552880"/>
             <a:ext cx="548640" cy="365760"/>
           </a:xfrm>
           <a:prstGeom prst="rect">
@@ -11255,7 +11255,7 @@
         <p:spPr>
           <a:xfrm>
             <a:off x="9898380" y="2963799"/>
-            <a:ext cx="549592" cy="549592"/>
+            <a:ext cx="483641" cy="483641"/>
           </a:xfrm>
           <a:prstGeom prst="line">
             <a:avLst/>
@@ -11278,7 +11278,7 @@
         <p:spPr>
           <a:xfrm>
             <a:off x="9898380" y="2963799"/>
-            <a:ext cx="0" cy="1212494"/>
+            <a:ext cx="0" cy="994867"/>
           </a:xfrm>
           <a:prstGeom prst="line">
             <a:avLst/>
@@ -12952,7 +12952,7 @@
         </p:nvSpPr>
         <p:spPr>
           <a:xfrm>
-            <a:off x="3530956" y="2044178"/>
+            <a:off x="3569818" y="1976867"/>
             <a:ext cx="548640" cy="365760"/>
           </a:xfrm>
           <a:prstGeom prst="rect">
@@ -12991,7 +12991,7 @@
         </p:nvSpPr>
         <p:spPr>
           <a:xfrm>
-            <a:off x="3952000" y="2465222"/>
+            <a:off x="4019311" y="2426360"/>
             <a:ext cx="548640" cy="365760"/>
           </a:xfrm>
           <a:prstGeom prst="rect">
@@ -13030,7 +13030,7 @@
         </p:nvSpPr>
         <p:spPr>
           <a:xfrm>
-            <a:off x="4106113" y="3040380"/>
+            <a:off x="4183837" y="3040380"/>
             <a:ext cx="548640" cy="365760"/>
           </a:xfrm>
           <a:prstGeom prst="rect">
@@ -13069,7 +13069,7 @@
         </p:nvSpPr>
         <p:spPr>
           <a:xfrm>
-            <a:off x="3952000" y="3615538"/>
+            <a:off x="4019311" y="3654400"/>
             <a:ext cx="548640" cy="365760"/>
           </a:xfrm>
           <a:prstGeom prst="rect">
@@ -13108,7 +13108,7 @@
         </p:nvSpPr>
         <p:spPr>
           <a:xfrm>
-            <a:off x="3530956" y="4036582"/>
+            <a:off x="3569818" y="4103893"/>
             <a:ext cx="548640" cy="365760"/>
           </a:xfrm>
           <a:prstGeom prst="rect">
@@ -13147,7 +13147,7 @@
         </p:nvSpPr>
         <p:spPr>
           <a:xfrm>
-            <a:off x="2955798" y="4190695"/>
+            <a:off x="2955798" y="4268419"/>
             <a:ext cx="548640" cy="365760"/>
           </a:xfrm>
           <a:prstGeom prst="rect">
@@ -13186,7 +13186,7 @@
         </p:nvSpPr>
         <p:spPr>
           <a:xfrm>
-            <a:off x="2380640" y="4036582"/>
+            <a:off x="2341778" y="4103893"/>
             <a:ext cx="548640" cy="365760"/>
           </a:xfrm>
           <a:prstGeom prst="rect">
@@ -13225,7 +13225,7 @@
         </p:nvSpPr>
         <p:spPr>
           <a:xfrm>
-            <a:off x="1959596" y="3615538"/>
+            <a:off x="1892285" y="3654400"/>
             <a:ext cx="548640" cy="365760"/>
           </a:xfrm>
           <a:prstGeom prst="rect">
@@ -13264,7 +13264,7 @@
         </p:nvSpPr>
         <p:spPr>
           <a:xfrm>
-            <a:off x="1805483" y="3040380"/>
+            <a:off x="1727759" y="3040380"/>
             <a:ext cx="548640" cy="365760"/>
           </a:xfrm>
           <a:prstGeom prst="rect">
@@ -13303,7 +13303,7 @@
         </p:nvSpPr>
         <p:spPr>
           <a:xfrm>
-            <a:off x="1959596" y="2465222"/>
+            <a:off x="1892285" y="2426360"/>
             <a:ext cx="548640" cy="365760"/>
           </a:xfrm>
           <a:prstGeom prst="rect">
@@ -13342,7 +13342,7 @@
         </p:nvSpPr>
         <p:spPr>
           <a:xfrm>
-            <a:off x="2380640" y="2044178"/>
+            <a:off x="2341778" y="1976867"/>
             <a:ext cx="548640" cy="365760"/>
           </a:xfrm>
           <a:prstGeom prst="rect">
@@ -13381,7 +13381,7 @@
         </p:nvSpPr>
         <p:spPr>
           <a:xfrm>
-            <a:off x="2955798" y="1890065"/>
+            <a:off x="2955798" y="1812341"/>
             <a:ext cx="548640" cy="365760"/>
           </a:xfrm>
           <a:prstGeom prst="rect">
@@ -13421,7 +13421,7 @@
         <p:spPr>
           <a:xfrm>
             <a:off x="3230118" y="3223260"/>
-            <a:ext cx="549592" cy="549592"/>
+            <a:ext cx="483641" cy="483641"/>
           </a:xfrm>
           <a:prstGeom prst="line">
             <a:avLst/>
@@ -13444,7 +13444,7 @@
         <p:spPr>
           <a:xfrm>
             <a:off x="3230118" y="3223260"/>
-            <a:ext cx="0" cy="1212494"/>
+            <a:ext cx="0" cy="994867"/>
           </a:xfrm>
           <a:prstGeom prst="line">
             <a:avLst/>
@@ -15277,7 +15277,7 @@
         </p:nvSpPr>
         <p:spPr>
           <a:xfrm>
-            <a:off x="3492717" y="1653067"/>
+            <a:off x="3528223" y="1591569"/>
             <a:ext cx="548640" cy="365760"/>
           </a:xfrm>
           <a:prstGeom prst="rect">
@@ -15316,7 +15316,7 @@
         </p:nvSpPr>
         <p:spPr>
           <a:xfrm>
-            <a:off x="3877402" y="2037752"/>
+            <a:off x="3938900" y="2002246"/>
             <a:ext cx="548640" cy="365760"/>
           </a:xfrm>
           <a:prstGeom prst="rect">
@@ -15355,7 +15355,7 @@
         </p:nvSpPr>
         <p:spPr>
           <a:xfrm>
-            <a:off x="4018206" y="2563241"/>
+            <a:off x="4089218" y="2563241"/>
             <a:ext cx="548640" cy="365760"/>
           </a:xfrm>
           <a:prstGeom prst="rect">
@@ -15394,7 +15394,7 @@
         </p:nvSpPr>
         <p:spPr>
           <a:xfrm>
-            <a:off x="3877402" y="3088730"/>
+            <a:off x="3938900" y="3124236"/>
             <a:ext cx="548640" cy="365760"/>
           </a:xfrm>
           <a:prstGeom prst="rect">
@@ -15433,7 +15433,7 @@
         </p:nvSpPr>
         <p:spPr>
           <a:xfrm>
-            <a:off x="3492717" y="3473415"/>
+            <a:off x="3528223" y="3534913"/>
             <a:ext cx="548640" cy="365760"/>
           </a:xfrm>
           <a:prstGeom prst="rect">
@@ -15472,7 +15472,7 @@
         </p:nvSpPr>
         <p:spPr>
           <a:xfrm>
-            <a:off x="2967228" y="3614219"/>
+            <a:off x="2967228" y="3685231"/>
             <a:ext cx="548640" cy="365760"/>
           </a:xfrm>
           <a:prstGeom prst="rect">
@@ -15511,7 +15511,7 @@
         </p:nvSpPr>
         <p:spPr>
           <a:xfrm>
-            <a:off x="2441739" y="3473415"/>
+            <a:off x="2406233" y="3534913"/>
             <a:ext cx="548640" cy="365760"/>
           </a:xfrm>
           <a:prstGeom prst="rect">
@@ -15550,7 +15550,7 @@
         </p:nvSpPr>
         <p:spPr>
           <a:xfrm>
-            <a:off x="2057054" y="3088730"/>
+            <a:off x="1995556" y="3124236"/>
             <a:ext cx="548640" cy="365760"/>
           </a:xfrm>
           <a:prstGeom prst="rect">
@@ -15589,7 +15589,7 @@
         </p:nvSpPr>
         <p:spPr>
           <a:xfrm>
-            <a:off x="1916250" y="2563241"/>
+            <a:off x="1845238" y="2563241"/>
             <a:ext cx="548640" cy="365760"/>
           </a:xfrm>
           <a:prstGeom prst="rect">
@@ -15628,7 +15628,7 @@
         </p:nvSpPr>
         <p:spPr>
           <a:xfrm>
-            <a:off x="2057054" y="2037752"/>
+            <a:off x="1995556" y="2002246"/>
             <a:ext cx="548640" cy="365760"/>
           </a:xfrm>
           <a:prstGeom prst="rect">
@@ -15667,7 +15667,7 @@
         </p:nvSpPr>
         <p:spPr>
           <a:xfrm>
-            <a:off x="2441739" y="1653067"/>
+            <a:off x="2406233" y="1591569"/>
             <a:ext cx="548640" cy="365760"/>
           </a:xfrm>
           <a:prstGeom prst="rect">
@@ -15706,7 +15706,7 @@
         </p:nvSpPr>
         <p:spPr>
           <a:xfrm>
-            <a:off x="2967228" y="1512263"/>
+            <a:off x="2967228" y="1441251"/>
             <a:ext cx="548640" cy="365760"/>
           </a:xfrm>
           <a:prstGeom prst="rect">
@@ -15746,7 +15746,7 @@
         <p:spPr>
           <a:xfrm>
             <a:off x="3241548" y="2746121"/>
-            <a:ext cx="0" cy="710121"/>
+            <a:ext cx="0" cy="624906"/>
           </a:xfrm>
           <a:prstGeom prst="line">
             <a:avLst/>
@@ -15768,8 +15768,8 @@
         </p:nvSpPr>
         <p:spPr>
           <a:xfrm flipV="1">
-            <a:off x="3241548" y="1638333"/>
-            <a:ext cx="0" cy="1107788"/>
+            <a:off x="3241548" y="1837167"/>
+            <a:ext cx="0" cy="908954"/>
           </a:xfrm>
           <a:prstGeom prst="line">
             <a:avLst/>
@@ -17260,7 +17260,7 @@
         </p:nvSpPr>
         <p:spPr>
           <a:xfrm>
-            <a:off x="9198573" y="1653067"/>
+            <a:off x="9234079" y="1591569"/>
             <a:ext cx="548640" cy="365760"/>
           </a:xfrm>
           <a:prstGeom prst="rect">
@@ -17299,7 +17299,7 @@
         </p:nvSpPr>
         <p:spPr>
           <a:xfrm>
-            <a:off x="9583258" y="2037752"/>
+            <a:off x="9644756" y="2002246"/>
             <a:ext cx="548640" cy="365760"/>
           </a:xfrm>
           <a:prstGeom prst="rect">
@@ -17338,7 +17338,7 @@
         </p:nvSpPr>
         <p:spPr>
           <a:xfrm>
-            <a:off x="9724062" y="2563241"/>
+            <a:off x="9795074" y="2563241"/>
             <a:ext cx="548640" cy="365760"/>
           </a:xfrm>
           <a:prstGeom prst="rect">
@@ -17377,7 +17377,7 @@
         </p:nvSpPr>
         <p:spPr>
           <a:xfrm>
-            <a:off x="9583258" y="3088730"/>
+            <a:off x="9644756" y="3124236"/>
             <a:ext cx="548640" cy="365760"/>
           </a:xfrm>
           <a:prstGeom prst="rect">
@@ -17416,7 +17416,7 @@
         </p:nvSpPr>
         <p:spPr>
           <a:xfrm>
-            <a:off x="9198573" y="3473415"/>
+            <a:off x="9234079" y="3534913"/>
             <a:ext cx="548640" cy="365760"/>
           </a:xfrm>
           <a:prstGeom prst="rect">
@@ -17455,7 +17455,7 @@
         </p:nvSpPr>
         <p:spPr>
           <a:xfrm>
-            <a:off x="8673084" y="3614219"/>
+            <a:off x="8673084" y="3685231"/>
             <a:ext cx="548640" cy="365760"/>
           </a:xfrm>
           <a:prstGeom prst="rect">
@@ -17494,7 +17494,7 @@
         </p:nvSpPr>
         <p:spPr>
           <a:xfrm>
-            <a:off x="8147595" y="3473415"/>
+            <a:off x="8112089" y="3534913"/>
             <a:ext cx="548640" cy="365760"/>
           </a:xfrm>
           <a:prstGeom prst="rect">
@@ -17533,7 +17533,7 @@
         </p:nvSpPr>
         <p:spPr>
           <a:xfrm>
-            <a:off x="7762910" y="3088730"/>
+            <a:off x="7701412" y="3124236"/>
             <a:ext cx="548640" cy="365760"/>
           </a:xfrm>
           <a:prstGeom prst="rect">
@@ -17572,7 +17572,7 @@
         </p:nvSpPr>
         <p:spPr>
           <a:xfrm>
-            <a:off x="7622106" y="2563241"/>
+            <a:off x="7551094" y="2563241"/>
             <a:ext cx="548640" cy="365760"/>
           </a:xfrm>
           <a:prstGeom prst="rect">
@@ -17611,7 +17611,7 @@
         </p:nvSpPr>
         <p:spPr>
           <a:xfrm>
-            <a:off x="7762910" y="2037752"/>
+            <a:off x="7701412" y="2002246"/>
             <a:ext cx="548640" cy="365760"/>
           </a:xfrm>
           <a:prstGeom prst="rect">
@@ -17650,7 +17650,7 @@
         </p:nvSpPr>
         <p:spPr>
           <a:xfrm>
-            <a:off x="8147595" y="1653067"/>
+            <a:off x="8112089" y="1591569"/>
             <a:ext cx="548640" cy="365760"/>
           </a:xfrm>
           <a:prstGeom prst="rect">
@@ -17689,7 +17689,7 @@
         </p:nvSpPr>
         <p:spPr>
           <a:xfrm>
-            <a:off x="8673084" y="1512263"/>
+            <a:off x="8673084" y="1441251"/>
             <a:ext cx="548640" cy="365760"/>
           </a:xfrm>
           <a:prstGeom prst="rect">
@@ -17728,8 +17728,8 @@
         </p:nvSpPr>
         <p:spPr>
           <a:xfrm flipH="1" flipV="1">
-            <a:off x="8261480" y="2562328"/>
-            <a:ext cx="685924" cy="183793"/>
+            <a:off x="8343791" y="2584383"/>
+            <a:ext cx="603613" cy="161738"/>
           </a:xfrm>
           <a:prstGeom prst="line">
             <a:avLst/>
@@ -17752,7 +17752,7 @@
         <p:spPr>
           <a:xfrm>
             <a:off x="8947404" y="2746121"/>
-            <a:ext cx="0" cy="1107788"/>
+            <a:ext cx="0" cy="908954"/>
           </a:xfrm>
           <a:prstGeom prst="line">
             <a:avLst/>
@@ -20140,7 +20140,7 @@
         </p:nvSpPr>
         <p:spPr>
           <a:xfrm>
-            <a:off x="2572786" y="2402082"/>
+            <a:off x="2611420" y="2335167"/>
             <a:ext cx="548640" cy="365760"/>
           </a:xfrm>
           <a:prstGeom prst="rect">
@@ -20179,7 +20179,7 @@
         </p:nvSpPr>
         <p:spPr>
           <a:xfrm>
-            <a:off x="2991354" y="2820650"/>
+            <a:off x="3058269" y="2782016"/>
             <a:ext cx="548640" cy="365760"/>
           </a:xfrm>
           <a:prstGeom prst="rect">
@@ -20218,7 +20218,7 @@
         </p:nvSpPr>
         <p:spPr>
           <a:xfrm>
-            <a:off x="3144561" y="3392424"/>
+            <a:off x="3221827" y="3392424"/>
             <a:ext cx="548640" cy="365760"/>
           </a:xfrm>
           <a:prstGeom prst="rect">
@@ -20257,7 +20257,7 @@
         </p:nvSpPr>
         <p:spPr>
           <a:xfrm>
-            <a:off x="2991354" y="3964198"/>
+            <a:off x="3058269" y="4002832"/>
             <a:ext cx="548640" cy="365760"/>
           </a:xfrm>
           <a:prstGeom prst="rect">
@@ -20296,7 +20296,7 @@
         </p:nvSpPr>
         <p:spPr>
           <a:xfrm>
-            <a:off x="2572786" y="4382766"/>
+            <a:off x="2611420" y="4449681"/>
             <a:ext cx="548640" cy="365760"/>
           </a:xfrm>
           <a:prstGeom prst="rect">
@@ -20335,7 +20335,7 @@
         </p:nvSpPr>
         <p:spPr>
           <a:xfrm>
-            <a:off x="2001012" y="4535973"/>
+            <a:off x="2001012" y="4613239"/>
             <a:ext cx="548640" cy="365760"/>
           </a:xfrm>
           <a:prstGeom prst="rect">
@@ -20374,7 +20374,7 @@
         </p:nvSpPr>
         <p:spPr>
           <a:xfrm>
-            <a:off x="1429238" y="4382766"/>
+            <a:off x="1390604" y="4449681"/>
             <a:ext cx="548640" cy="365760"/>
           </a:xfrm>
           <a:prstGeom prst="rect">
@@ -20413,7 +20413,7 @@
         </p:nvSpPr>
         <p:spPr>
           <a:xfrm>
-            <a:off x="1010670" y="3964198"/>
+            <a:off x="943755" y="4002832"/>
             <a:ext cx="548640" cy="365760"/>
           </a:xfrm>
           <a:prstGeom prst="rect">
@@ -20452,7 +20452,7 @@
         </p:nvSpPr>
         <p:spPr>
           <a:xfrm>
-            <a:off x="857463" y="3392424"/>
+            <a:off x="780197" y="3392424"/>
             <a:ext cx="548640" cy="365760"/>
           </a:xfrm>
           <a:prstGeom prst="rect">
@@ -20491,7 +20491,7 @@
         </p:nvSpPr>
         <p:spPr>
           <a:xfrm>
-            <a:off x="1010670" y="2820650"/>
+            <a:off x="943755" y="2782016"/>
             <a:ext cx="548640" cy="365760"/>
           </a:xfrm>
           <a:prstGeom prst="rect">
@@ -20530,7 +20530,7 @@
         </p:nvSpPr>
         <p:spPr>
           <a:xfrm>
-            <a:off x="1429238" y="2402082"/>
+            <a:off x="1390604" y="2335167"/>
             <a:ext cx="548640" cy="365760"/>
           </a:xfrm>
           <a:prstGeom prst="rect">
@@ -20569,7 +20569,7 @@
         </p:nvSpPr>
         <p:spPr>
           <a:xfrm>
-            <a:off x="2001012" y="2248875"/>
+            <a:off x="2001012" y="2171609"/>
             <a:ext cx="548640" cy="365760"/>
           </a:xfrm>
           <a:prstGeom prst="rect">
@@ -20608,8 +20608,8 @@
         </p:nvSpPr>
         <p:spPr>
           <a:xfrm flipH="1">
-            <a:off x="1528992" y="3575304"/>
-            <a:ext cx="746340" cy="199981"/>
+            <a:off x="1618553" y="3575304"/>
+            <a:ext cx="656779" cy="175983"/>
           </a:xfrm>
           <a:prstGeom prst="line">
             <a:avLst/>
@@ -20632,7 +20632,7 @@
         <p:spPr>
           <a:xfrm>
             <a:off x="2275332" y="3575304"/>
-            <a:ext cx="0" cy="1205362"/>
+            <a:ext cx="0" cy="989015"/>
           </a:xfrm>
           <a:prstGeom prst="line">
             <a:avLst/>
@@ -22131,7 +22131,7 @@
         </p:nvSpPr>
         <p:spPr>
           <a:xfrm>
-            <a:off x="6391930" y="2402082"/>
+            <a:off x="6430564" y="2335167"/>
             <a:ext cx="548640" cy="365760"/>
           </a:xfrm>
           <a:prstGeom prst="rect">
@@ -22170,7 +22170,7 @@
         </p:nvSpPr>
         <p:spPr>
           <a:xfrm>
-            <a:off x="6810498" y="2820650"/>
+            <a:off x="6877413" y="2782016"/>
             <a:ext cx="548640" cy="365760"/>
           </a:xfrm>
           <a:prstGeom prst="rect">
@@ -22209,7 +22209,7 @@
         </p:nvSpPr>
         <p:spPr>
           <a:xfrm>
-            <a:off x="6963705" y="3392424"/>
+            <a:off x="7040971" y="3392424"/>
             <a:ext cx="548640" cy="365760"/>
           </a:xfrm>
           <a:prstGeom prst="rect">
@@ -22248,7 +22248,7 @@
         </p:nvSpPr>
         <p:spPr>
           <a:xfrm>
-            <a:off x="6810498" y="3964198"/>
+            <a:off x="6877413" y="4002832"/>
             <a:ext cx="548640" cy="365760"/>
           </a:xfrm>
           <a:prstGeom prst="rect">
@@ -22287,7 +22287,7 @@
         </p:nvSpPr>
         <p:spPr>
           <a:xfrm>
-            <a:off x="6391930" y="4382766"/>
+            <a:off x="6430564" y="4449681"/>
             <a:ext cx="548640" cy="365760"/>
           </a:xfrm>
           <a:prstGeom prst="rect">
@@ -22326,7 +22326,7 @@
         </p:nvSpPr>
         <p:spPr>
           <a:xfrm>
-            <a:off x="5820156" y="4535973"/>
+            <a:off x="5820156" y="4613239"/>
             <a:ext cx="548640" cy="365760"/>
           </a:xfrm>
           <a:prstGeom prst="rect">
@@ -22365,7 +22365,7 @@
         </p:nvSpPr>
         <p:spPr>
           <a:xfrm>
-            <a:off x="5248382" y="4382766"/>
+            <a:off x="5209748" y="4449681"/>
             <a:ext cx="548640" cy="365760"/>
           </a:xfrm>
           <a:prstGeom prst="rect">
@@ -22404,7 +22404,7 @@
         </p:nvSpPr>
         <p:spPr>
           <a:xfrm>
-            <a:off x="4829814" y="3964198"/>
+            <a:off x="4762899" y="4002832"/>
             <a:ext cx="548640" cy="365760"/>
           </a:xfrm>
           <a:prstGeom prst="rect">
@@ -22443,7 +22443,7 @@
         </p:nvSpPr>
         <p:spPr>
           <a:xfrm>
-            <a:off x="4676607" y="3392424"/>
+            <a:off x="4599341" y="3392424"/>
             <a:ext cx="548640" cy="365760"/>
           </a:xfrm>
           <a:prstGeom prst="rect">
@@ -22482,7 +22482,7 @@
         </p:nvSpPr>
         <p:spPr>
           <a:xfrm>
-            <a:off x="4829814" y="2820650"/>
+            <a:off x="4762899" y="2782016"/>
             <a:ext cx="548640" cy="365760"/>
           </a:xfrm>
           <a:prstGeom prst="rect">
@@ -22521,7 +22521,7 @@
         </p:nvSpPr>
         <p:spPr>
           <a:xfrm>
-            <a:off x="5248382" y="2402082"/>
+            <a:off x="5209748" y="2335167"/>
             <a:ext cx="548640" cy="365760"/>
           </a:xfrm>
           <a:prstGeom prst="rect">
@@ -22560,7 +22560,7 @@
         </p:nvSpPr>
         <p:spPr>
           <a:xfrm>
-            <a:off x="5820156" y="2248875"/>
+            <a:off x="5820156" y="2171609"/>
             <a:ext cx="548640" cy="365760"/>
           </a:xfrm>
           <a:prstGeom prst="rect">
@@ -22599,8 +22599,8 @@
         </p:nvSpPr>
         <p:spPr>
           <a:xfrm flipH="1" flipV="1">
-            <a:off x="5348136" y="3375323"/>
-            <a:ext cx="746340" cy="199981"/>
+            <a:off x="5437697" y="3399321"/>
+            <a:ext cx="656779" cy="175983"/>
           </a:xfrm>
           <a:prstGeom prst="line">
             <a:avLst/>
@@ -22623,7 +22623,7 @@
         <p:spPr>
           <a:xfrm>
             <a:off x="6094476" y="3575304"/>
-            <a:ext cx="0" cy="1205362"/>
+            <a:ext cx="0" cy="989015"/>
           </a:xfrm>
           <a:prstGeom prst="line">
             <a:avLst/>
@@ -24122,7 +24122,7 @@
         </p:nvSpPr>
         <p:spPr>
           <a:xfrm>
-            <a:off x="10211074" y="2402082"/>
+            <a:off x="10249708" y="2335167"/>
             <a:ext cx="548640" cy="365760"/>
           </a:xfrm>
           <a:prstGeom prst="rect">
@@ -24161,7 +24161,7 @@
         </p:nvSpPr>
         <p:spPr>
           <a:xfrm>
-            <a:off x="10629642" y="2820650"/>
+            <a:off x="10696557" y="2782016"/>
             <a:ext cx="548640" cy="365760"/>
           </a:xfrm>
           <a:prstGeom prst="rect">
@@ -24200,7 +24200,7 @@
         </p:nvSpPr>
         <p:spPr>
           <a:xfrm>
-            <a:off x="10782849" y="3392424"/>
+            <a:off x="10860115" y="3392424"/>
             <a:ext cx="548640" cy="365760"/>
           </a:xfrm>
           <a:prstGeom prst="rect">
@@ -24239,7 +24239,7 @@
         </p:nvSpPr>
         <p:spPr>
           <a:xfrm>
-            <a:off x="10629642" y="3964198"/>
+            <a:off x="10696557" y="4002832"/>
             <a:ext cx="548640" cy="365760"/>
           </a:xfrm>
           <a:prstGeom prst="rect">
@@ -24278,7 +24278,7 @@
         </p:nvSpPr>
         <p:spPr>
           <a:xfrm>
-            <a:off x="10211074" y="4382766"/>
+            <a:off x="10249708" y="4449681"/>
             <a:ext cx="548640" cy="365760"/>
           </a:xfrm>
           <a:prstGeom prst="rect">
@@ -24317,7 +24317,7 @@
         </p:nvSpPr>
         <p:spPr>
           <a:xfrm>
-            <a:off x="9639300" y="4535973"/>
+            <a:off x="9639300" y="4613239"/>
             <a:ext cx="548640" cy="365760"/>
           </a:xfrm>
           <a:prstGeom prst="rect">
@@ -24356,7 +24356,7 @@
         </p:nvSpPr>
         <p:spPr>
           <a:xfrm>
-            <a:off x="9067526" y="4382766"/>
+            <a:off x="9028892" y="4449681"/>
             <a:ext cx="548640" cy="365760"/>
           </a:xfrm>
           <a:prstGeom prst="rect">
@@ -24395,7 +24395,7 @@
         </p:nvSpPr>
         <p:spPr>
           <a:xfrm>
-            <a:off x="8648958" y="3964198"/>
+            <a:off x="8582043" y="4002832"/>
             <a:ext cx="548640" cy="365760"/>
           </a:xfrm>
           <a:prstGeom prst="rect">
@@ -24434,7 +24434,7 @@
         </p:nvSpPr>
         <p:spPr>
           <a:xfrm>
-            <a:off x="8495751" y="3392424"/>
+            <a:off x="8418485" y="3392424"/>
             <a:ext cx="548640" cy="365760"/>
           </a:xfrm>
           <a:prstGeom prst="rect">
@@ -24473,7 +24473,7 @@
         </p:nvSpPr>
         <p:spPr>
           <a:xfrm>
-            <a:off x="8648958" y="2820650"/>
+            <a:off x="8582043" y="2782016"/>
             <a:ext cx="548640" cy="365760"/>
           </a:xfrm>
           <a:prstGeom prst="rect">
@@ -24512,7 +24512,7 @@
         </p:nvSpPr>
         <p:spPr>
           <a:xfrm>
-            <a:off x="9067526" y="2402082"/>
+            <a:off x="9028892" y="2335167"/>
             <a:ext cx="548640" cy="365760"/>
           </a:xfrm>
           <a:prstGeom prst="rect">
@@ -24551,7 +24551,7 @@
         </p:nvSpPr>
         <p:spPr>
           <a:xfrm>
-            <a:off x="9639300" y="2248875"/>
+            <a:off x="9639300" y="2171609"/>
             <a:ext cx="548640" cy="365760"/>
           </a:xfrm>
           <a:prstGeom prst="rect">
@@ -24590,8 +24590,8 @@
         </p:nvSpPr>
         <p:spPr>
           <a:xfrm flipH="1">
-            <a:off x="9244470" y="3575304"/>
-            <a:ext cx="669150" cy="386334"/>
+            <a:off x="9324768" y="3575304"/>
+            <a:ext cx="588852" cy="339974"/>
           </a:xfrm>
           <a:prstGeom prst="line">
             <a:avLst/>
@@ -24613,8 +24613,8 @@
         </p:nvSpPr>
         <p:spPr>
           <a:xfrm flipV="1">
-            <a:off x="9913620" y="2369942"/>
-            <a:ext cx="0" cy="1205362"/>
+            <a:off x="9913620" y="2586289"/>
+            <a:ext cx="0" cy="989015"/>
           </a:xfrm>
           <a:prstGeom prst="line">
             <a:avLst/>
@@ -26652,7 +26652,7 @@
         </p:nvSpPr>
         <p:spPr>
           <a:xfrm>
-            <a:off x="3530956" y="2592818"/>
+            <a:off x="3569818" y="2525507"/>
             <a:ext cx="548640" cy="365760"/>
           </a:xfrm>
           <a:prstGeom prst="rect">
@@ -26691,7 +26691,7 @@
         </p:nvSpPr>
         <p:spPr>
           <a:xfrm>
-            <a:off x="3952000" y="3013862"/>
+            <a:off x="4019311" y="2975000"/>
             <a:ext cx="548640" cy="365760"/>
           </a:xfrm>
           <a:prstGeom prst="rect">
@@ -26730,7 +26730,7 @@
         </p:nvSpPr>
         <p:spPr>
           <a:xfrm>
-            <a:off x="4106113" y="3589020"/>
+            <a:off x="4183837" y="3589020"/>
             <a:ext cx="548640" cy="365760"/>
           </a:xfrm>
           <a:prstGeom prst="rect">
@@ -26769,7 +26769,7 @@
         </p:nvSpPr>
         <p:spPr>
           <a:xfrm>
-            <a:off x="3952000" y="4164178"/>
+            <a:off x="4019311" y="4203040"/>
             <a:ext cx="548640" cy="365760"/>
           </a:xfrm>
           <a:prstGeom prst="rect">
@@ -26808,7 +26808,7 @@
         </p:nvSpPr>
         <p:spPr>
           <a:xfrm>
-            <a:off x="3530956" y="4585222"/>
+            <a:off x="3569818" y="4652533"/>
             <a:ext cx="548640" cy="365760"/>
           </a:xfrm>
           <a:prstGeom prst="rect">
@@ -26847,7 +26847,7 @@
         </p:nvSpPr>
         <p:spPr>
           <a:xfrm>
-            <a:off x="2955798" y="4739335"/>
+            <a:off x="2955798" y="4817059"/>
             <a:ext cx="548640" cy="365760"/>
           </a:xfrm>
           <a:prstGeom prst="rect">
@@ -26886,7 +26886,7 @@
         </p:nvSpPr>
         <p:spPr>
           <a:xfrm>
-            <a:off x="2380640" y="4585222"/>
+            <a:off x="2341778" y="4652533"/>
             <a:ext cx="548640" cy="365760"/>
           </a:xfrm>
           <a:prstGeom prst="rect">
@@ -26925,7 +26925,7 @@
         </p:nvSpPr>
         <p:spPr>
           <a:xfrm>
-            <a:off x="1959596" y="4164178"/>
+            <a:off x="1892285" y="4203040"/>
             <a:ext cx="548640" cy="365760"/>
           </a:xfrm>
           <a:prstGeom prst="rect">
@@ -26964,7 +26964,7 @@
         </p:nvSpPr>
         <p:spPr>
           <a:xfrm>
-            <a:off x="1805483" y="3589020"/>
+            <a:off x="1727759" y="3589020"/>
             <a:ext cx="548640" cy="365760"/>
           </a:xfrm>
           <a:prstGeom prst="rect">
@@ -27003,7 +27003,7 @@
         </p:nvSpPr>
         <p:spPr>
           <a:xfrm>
-            <a:off x="1959596" y="3013862"/>
+            <a:off x="1892285" y="2975000"/>
             <a:ext cx="548640" cy="365760"/>
           </a:xfrm>
           <a:prstGeom prst="rect">
@@ -27042,7 +27042,7 @@
         </p:nvSpPr>
         <p:spPr>
           <a:xfrm>
-            <a:off x="2380640" y="2592818"/>
+            <a:off x="2341778" y="2525507"/>
             <a:ext cx="548640" cy="365760"/>
           </a:xfrm>
           <a:prstGeom prst="rect">
@@ -27081,7 +27081,7 @@
         </p:nvSpPr>
         <p:spPr>
           <a:xfrm>
-            <a:off x="2955798" y="2438705"/>
+            <a:off x="2955798" y="2360981"/>
             <a:ext cx="548640" cy="365760"/>
           </a:xfrm>
           <a:prstGeom prst="rect">
@@ -29174,7 +29174,7 @@
         </p:nvSpPr>
         <p:spPr>
           <a:xfrm>
-            <a:off x="3530956" y="2592818"/>
+            <a:off x="3569818" y="2525507"/>
             <a:ext cx="548640" cy="365760"/>
           </a:xfrm>
           <a:prstGeom prst="rect">
@@ -29213,7 +29213,7 @@
         </p:nvSpPr>
         <p:spPr>
           <a:xfrm>
-            <a:off x="3952000" y="3013862"/>
+            <a:off x="4019311" y="2975000"/>
             <a:ext cx="548640" cy="365760"/>
           </a:xfrm>
           <a:prstGeom prst="rect">
@@ -29252,7 +29252,7 @@
         </p:nvSpPr>
         <p:spPr>
           <a:xfrm>
-            <a:off x="4106113" y="3589020"/>
+            <a:off x="4183837" y="3589020"/>
             <a:ext cx="548640" cy="365760"/>
           </a:xfrm>
           <a:prstGeom prst="rect">
@@ -29291,7 +29291,7 @@
         </p:nvSpPr>
         <p:spPr>
           <a:xfrm>
-            <a:off x="3952000" y="4164178"/>
+            <a:off x="4019311" y="4203040"/>
             <a:ext cx="548640" cy="365760"/>
           </a:xfrm>
           <a:prstGeom prst="rect">
@@ -29330,7 +29330,7 @@
         </p:nvSpPr>
         <p:spPr>
           <a:xfrm>
-            <a:off x="3530956" y="4585222"/>
+            <a:off x="3569818" y="4652533"/>
             <a:ext cx="548640" cy="365760"/>
           </a:xfrm>
           <a:prstGeom prst="rect">
@@ -29369,7 +29369,7 @@
         </p:nvSpPr>
         <p:spPr>
           <a:xfrm>
-            <a:off x="2955798" y="4739335"/>
+            <a:off x="2955798" y="4817059"/>
             <a:ext cx="548640" cy="365760"/>
           </a:xfrm>
           <a:prstGeom prst="rect">
@@ -29408,7 +29408,7 @@
         </p:nvSpPr>
         <p:spPr>
           <a:xfrm>
-            <a:off x="2380640" y="4585222"/>
+            <a:off x="2341778" y="4652533"/>
             <a:ext cx="548640" cy="365760"/>
           </a:xfrm>
           <a:prstGeom prst="rect">
@@ -29447,7 +29447,7 @@
         </p:nvSpPr>
         <p:spPr>
           <a:xfrm>
-            <a:off x="1959596" y="4164178"/>
+            <a:off x="1892285" y="4203040"/>
             <a:ext cx="548640" cy="365760"/>
           </a:xfrm>
           <a:prstGeom prst="rect">
@@ -29486,7 +29486,7 @@
         </p:nvSpPr>
         <p:spPr>
           <a:xfrm>
-            <a:off x="1805483" y="3589020"/>
+            <a:off x="1727759" y="3589020"/>
             <a:ext cx="548640" cy="365760"/>
           </a:xfrm>
           <a:prstGeom prst="rect">
@@ -29525,7 +29525,7 @@
         </p:nvSpPr>
         <p:spPr>
           <a:xfrm>
-            <a:off x="1959596" y="3013862"/>
+            <a:off x="1892285" y="2975000"/>
             <a:ext cx="548640" cy="365760"/>
           </a:xfrm>
           <a:prstGeom prst="rect">
@@ -29564,7 +29564,7 @@
         </p:nvSpPr>
         <p:spPr>
           <a:xfrm>
-            <a:off x="2380640" y="2592818"/>
+            <a:off x="2341778" y="2525507"/>
             <a:ext cx="548640" cy="365760"/>
           </a:xfrm>
           <a:prstGeom prst="rect">
@@ -29603,7 +29603,7 @@
         </p:nvSpPr>
         <p:spPr>
           <a:xfrm>
-            <a:off x="2955798" y="2438705"/>
+            <a:off x="2955798" y="2360981"/>
             <a:ext cx="548640" cy="365760"/>
           </a:xfrm>
           <a:prstGeom prst="rect">
@@ -29643,7 +29643,7 @@
         <p:spPr>
           <a:xfrm>
             <a:off x="3230118" y="3771900"/>
-            <a:ext cx="777240" cy="0"/>
+            <a:ext cx="683971" cy="0"/>
           </a:xfrm>
           <a:prstGeom prst="line">
             <a:avLst/>
@@ -29665,8 +29665,8 @@
         </p:nvSpPr>
         <p:spPr>
           <a:xfrm flipV="1">
-            <a:off x="3230118" y="2559406"/>
-            <a:ext cx="0" cy="1212494"/>
+            <a:off x="3230118" y="2777033"/>
+            <a:ext cx="0" cy="994867"/>
           </a:xfrm>
           <a:prstGeom prst="line">
             <a:avLst/>
@@ -31499,7 +31499,7 @@
         </p:nvSpPr>
         <p:spPr>
           <a:xfrm>
-            <a:off x="3492717" y="1653067"/>
+            <a:off x="3528223" y="1591569"/>
             <a:ext cx="548640" cy="365760"/>
           </a:xfrm>
           <a:prstGeom prst="rect">
@@ -31538,7 +31538,7 @@
         </p:nvSpPr>
         <p:spPr>
           <a:xfrm>
-            <a:off x="3877402" y="2037752"/>
+            <a:off x="3938900" y="2002246"/>
             <a:ext cx="548640" cy="365760"/>
           </a:xfrm>
           <a:prstGeom prst="rect">
@@ -31577,7 +31577,7 @@
         </p:nvSpPr>
         <p:spPr>
           <a:xfrm>
-            <a:off x="4018206" y="2563241"/>
+            <a:off x="4089218" y="2563241"/>
             <a:ext cx="548640" cy="365760"/>
           </a:xfrm>
           <a:prstGeom prst="rect">
@@ -31616,7 +31616,7 @@
         </p:nvSpPr>
         <p:spPr>
           <a:xfrm>
-            <a:off x="3877402" y="3088730"/>
+            <a:off x="3938900" y="3124236"/>
             <a:ext cx="548640" cy="365760"/>
           </a:xfrm>
           <a:prstGeom prst="rect">
@@ -31655,7 +31655,7 @@
         </p:nvSpPr>
         <p:spPr>
           <a:xfrm>
-            <a:off x="3492717" y="3473415"/>
+            <a:off x="3528223" y="3534913"/>
             <a:ext cx="548640" cy="365760"/>
           </a:xfrm>
           <a:prstGeom prst="rect">
@@ -31694,7 +31694,7 @@
         </p:nvSpPr>
         <p:spPr>
           <a:xfrm>
-            <a:off x="2967228" y="3614219"/>
+            <a:off x="2967228" y="3685231"/>
             <a:ext cx="548640" cy="365760"/>
           </a:xfrm>
           <a:prstGeom prst="rect">
@@ -31733,7 +31733,7 @@
         </p:nvSpPr>
         <p:spPr>
           <a:xfrm>
-            <a:off x="2441739" y="3473415"/>
+            <a:off x="2406233" y="3534913"/>
             <a:ext cx="548640" cy="365760"/>
           </a:xfrm>
           <a:prstGeom prst="rect">
@@ -31772,7 +31772,7 @@
         </p:nvSpPr>
         <p:spPr>
           <a:xfrm>
-            <a:off x="2057054" y="3088730"/>
+            <a:off x="1995556" y="3124236"/>
             <a:ext cx="548640" cy="365760"/>
           </a:xfrm>
           <a:prstGeom prst="rect">
@@ -31811,7 +31811,7 @@
         </p:nvSpPr>
         <p:spPr>
           <a:xfrm>
-            <a:off x="1916250" y="2563241"/>
+            <a:off x="1845238" y="2563241"/>
             <a:ext cx="548640" cy="365760"/>
           </a:xfrm>
           <a:prstGeom prst="rect">
@@ -31850,7 +31850,7 @@
         </p:nvSpPr>
         <p:spPr>
           <a:xfrm>
-            <a:off x="2057054" y="2037752"/>
+            <a:off x="1995556" y="2002246"/>
             <a:ext cx="548640" cy="365760"/>
           </a:xfrm>
           <a:prstGeom prst="rect">
@@ -31889,7 +31889,7 @@
         </p:nvSpPr>
         <p:spPr>
           <a:xfrm>
-            <a:off x="2441739" y="1653067"/>
+            <a:off x="2406233" y="1591569"/>
             <a:ext cx="548640" cy="365760"/>
           </a:xfrm>
           <a:prstGeom prst="rect">
@@ -31928,7 +31928,7 @@
         </p:nvSpPr>
         <p:spPr>
           <a:xfrm>
-            <a:off x="2967228" y="1512263"/>
+            <a:off x="2967228" y="1441251"/>
             <a:ext cx="548640" cy="365760"/>
           </a:xfrm>
           <a:prstGeom prst="rect">
@@ -31968,7 +31968,7 @@
         <p:spPr>
           <a:xfrm>
             <a:off x="3241548" y="2746121"/>
-            <a:ext cx="710121" cy="0"/>
+            <a:ext cx="624906" cy="0"/>
           </a:xfrm>
           <a:prstGeom prst="line">
             <a:avLst/>
@@ -31990,8 +31990,8 @@
         </p:nvSpPr>
         <p:spPr>
           <a:xfrm flipV="1">
-            <a:off x="3241548" y="1638333"/>
-            <a:ext cx="0" cy="1107788"/>
+            <a:off x="3241548" y="1837167"/>
+            <a:ext cx="0" cy="908954"/>
           </a:xfrm>
           <a:prstGeom prst="line">
             <a:avLst/>
@@ -33482,7 +33482,7 @@
         </p:nvSpPr>
         <p:spPr>
           <a:xfrm>
-            <a:off x="9198573" y="1653067"/>
+            <a:off x="9234079" y="1591569"/>
             <a:ext cx="548640" cy="365760"/>
           </a:xfrm>
           <a:prstGeom prst="rect">
@@ -33521,7 +33521,7 @@
         </p:nvSpPr>
         <p:spPr>
           <a:xfrm>
-            <a:off x="9583258" y="2037752"/>
+            <a:off x="9644756" y="2002246"/>
             <a:ext cx="548640" cy="365760"/>
           </a:xfrm>
           <a:prstGeom prst="rect">
@@ -33560,7 +33560,7 @@
         </p:nvSpPr>
         <p:spPr>
           <a:xfrm>
-            <a:off x="9724062" y="2563241"/>
+            <a:off x="9795074" y="2563241"/>
             <a:ext cx="548640" cy="365760"/>
           </a:xfrm>
           <a:prstGeom prst="rect">
@@ -33599,7 +33599,7 @@
         </p:nvSpPr>
         <p:spPr>
           <a:xfrm>
-            <a:off x="9583258" y="3088730"/>
+            <a:off x="9644756" y="3124236"/>
             <a:ext cx="548640" cy="365760"/>
           </a:xfrm>
           <a:prstGeom prst="rect">
@@ -33638,7 +33638,7 @@
         </p:nvSpPr>
         <p:spPr>
           <a:xfrm>
-            <a:off x="9198573" y="3473415"/>
+            <a:off x="9234079" y="3534913"/>
             <a:ext cx="548640" cy="365760"/>
           </a:xfrm>
           <a:prstGeom prst="rect">
@@ -33677,7 +33677,7 @@
         </p:nvSpPr>
         <p:spPr>
           <a:xfrm>
-            <a:off x="8673084" y="3614219"/>
+            <a:off x="8673084" y="3685231"/>
             <a:ext cx="548640" cy="365760"/>
           </a:xfrm>
           <a:prstGeom prst="rect">
@@ -33716,7 +33716,7 @@
         </p:nvSpPr>
         <p:spPr>
           <a:xfrm>
-            <a:off x="8147595" y="3473415"/>
+            <a:off x="8112089" y="3534913"/>
             <a:ext cx="548640" cy="365760"/>
           </a:xfrm>
           <a:prstGeom prst="rect">
@@ -33755,7 +33755,7 @@
         </p:nvSpPr>
         <p:spPr>
           <a:xfrm>
-            <a:off x="7762910" y="3088730"/>
+            <a:off x="7701412" y="3124236"/>
             <a:ext cx="548640" cy="365760"/>
           </a:xfrm>
           <a:prstGeom prst="rect">
@@ -33794,7 +33794,7 @@
         </p:nvSpPr>
         <p:spPr>
           <a:xfrm>
-            <a:off x="7622106" y="2563241"/>
+            <a:off x="7551094" y="2563241"/>
             <a:ext cx="548640" cy="365760"/>
           </a:xfrm>
           <a:prstGeom prst="rect">
@@ -33833,7 +33833,7 @@
         </p:nvSpPr>
         <p:spPr>
           <a:xfrm>
-            <a:off x="7762910" y="2037752"/>
+            <a:off x="7701412" y="2002246"/>
             <a:ext cx="548640" cy="365760"/>
           </a:xfrm>
           <a:prstGeom prst="rect">
@@ -33872,7 +33872,7 @@
         </p:nvSpPr>
         <p:spPr>
           <a:xfrm>
-            <a:off x="8147595" y="1653067"/>
+            <a:off x="8112089" y="1591569"/>
             <a:ext cx="548640" cy="365760"/>
           </a:xfrm>
           <a:prstGeom prst="rect">
@@ -33911,7 +33911,7 @@
         </p:nvSpPr>
         <p:spPr>
           <a:xfrm>
-            <a:off x="8673084" y="1512263"/>
+            <a:off x="8673084" y="1441251"/>
             <a:ext cx="548640" cy="365760"/>
           </a:xfrm>
           <a:prstGeom prst="rect">
@@ -33950,8 +33950,8 @@
         </p:nvSpPr>
         <p:spPr>
           <a:xfrm flipH="1">
-            <a:off x="8332422" y="2746121"/>
-            <a:ext cx="614982" cy="355060"/>
+            <a:off x="8406219" y="2746121"/>
+            <a:ext cx="541185" cy="312453"/>
           </a:xfrm>
           <a:prstGeom prst="line">
             <a:avLst/>
@@ -33973,8 +33973,8 @@
         </p:nvSpPr>
         <p:spPr>
           <a:xfrm flipV="1">
-            <a:off x="8947404" y="1638333"/>
-            <a:ext cx="0" cy="1107788"/>
+            <a:off x="8947404" y="1837167"/>
+            <a:ext cx="0" cy="908954"/>
           </a:xfrm>
           <a:prstGeom prst="line">
             <a:avLst/>
@@ -35618,7 +35618,7 @@
         </p:nvSpPr>
         <p:spPr>
           <a:xfrm>
-            <a:off x="9581449" y="3232898"/>
+            <a:off x="9620311" y="3165587"/>
             <a:ext cx="548640" cy="365760"/>
           </a:xfrm>
           <a:prstGeom prst="rect">
@@ -35657,7 +35657,7 @@
         </p:nvSpPr>
         <p:spPr>
           <a:xfrm>
-            <a:off x="10002494" y="3653942"/>
+            <a:off x="10069805" y="3615080"/>
             <a:ext cx="548640" cy="365760"/>
           </a:xfrm>
           <a:prstGeom prst="rect">
@@ -35696,7 +35696,7 @@
         </p:nvSpPr>
         <p:spPr>
           <a:xfrm>
-            <a:off x="10156607" y="4229100"/>
+            <a:off x="10234331" y="4229100"/>
             <a:ext cx="548640" cy="365760"/>
           </a:xfrm>
           <a:prstGeom prst="rect">
@@ -35735,7 +35735,7 @@
         </p:nvSpPr>
         <p:spPr>
           <a:xfrm>
-            <a:off x="10002494" y="4804258"/>
+            <a:off x="10069805" y="4843120"/>
             <a:ext cx="548640" cy="365760"/>
           </a:xfrm>
           <a:prstGeom prst="rect">
@@ -35774,7 +35774,7 @@
         </p:nvSpPr>
         <p:spPr>
           <a:xfrm>
-            <a:off x="9581449" y="5225302"/>
+            <a:off x="9620311" y="5292613"/>
             <a:ext cx="548640" cy="365760"/>
           </a:xfrm>
           <a:prstGeom prst="rect">
@@ -35813,7 +35813,7 @@
         </p:nvSpPr>
         <p:spPr>
           <a:xfrm>
-            <a:off x="9006291" y="5379415"/>
+            <a:off x="9006291" y="5457139"/>
             <a:ext cx="548640" cy="365760"/>
           </a:xfrm>
           <a:prstGeom prst="rect">
@@ -35852,7 +35852,7 @@
         </p:nvSpPr>
         <p:spPr>
           <a:xfrm>
-            <a:off x="8431134" y="5225302"/>
+            <a:off x="8392272" y="5292613"/>
             <a:ext cx="548640" cy="365760"/>
           </a:xfrm>
           <a:prstGeom prst="rect">
@@ -35891,7 +35891,7 @@
         </p:nvSpPr>
         <p:spPr>
           <a:xfrm>
-            <a:off x="8010089" y="4804258"/>
+            <a:off x="7942778" y="4843120"/>
             <a:ext cx="548640" cy="365760"/>
           </a:xfrm>
           <a:prstGeom prst="rect">
@@ -35930,7 +35930,7 @@
         </p:nvSpPr>
         <p:spPr>
           <a:xfrm>
-            <a:off x="7855976" y="4229100"/>
+            <a:off x="7778252" y="4229100"/>
             <a:ext cx="548640" cy="365760"/>
           </a:xfrm>
           <a:prstGeom prst="rect">
@@ -35969,7 +35969,7 @@
         </p:nvSpPr>
         <p:spPr>
           <a:xfrm>
-            <a:off x="8010089" y="3653942"/>
+            <a:off x="7942778" y="3615080"/>
             <a:ext cx="548640" cy="365760"/>
           </a:xfrm>
           <a:prstGeom prst="rect">
@@ -36008,7 +36008,7 @@
         </p:nvSpPr>
         <p:spPr>
           <a:xfrm>
-            <a:off x="8431134" y="3232898"/>
+            <a:off x="8392272" y="3165587"/>
             <a:ext cx="548640" cy="365760"/>
           </a:xfrm>
           <a:prstGeom prst="rect">
@@ -36047,7 +36047,7 @@
         </p:nvSpPr>
         <p:spPr>
           <a:xfrm>
-            <a:off x="9006291" y="3078785"/>
+            <a:off x="9006291" y="3001061"/>
             <a:ext cx="548640" cy="365760"/>
           </a:xfrm>
           <a:prstGeom prst="rect">
@@ -36087,7 +36087,7 @@
         <p:spPr>
           <a:xfrm>
             <a:off x="9280611" y="4411980"/>
-            <a:ext cx="388620" cy="673110"/>
+            <a:ext cx="341986" cy="592336"/>
           </a:xfrm>
           <a:prstGeom prst="line">
             <a:avLst/>
@@ -36109,8 +36109,8 @@
         </p:nvSpPr>
         <p:spPr>
           <a:xfrm flipV="1">
-            <a:off x="9280611" y="3199486"/>
-            <a:ext cx="0" cy="1212494"/>
+            <a:off x="9280611" y="3417113"/>
+            <a:ext cx="0" cy="994867"/>
           </a:xfrm>
           <a:prstGeom prst="line">
             <a:avLst/>
@@ -37913,7 +37913,7 @@
         </p:nvSpPr>
         <p:spPr>
           <a:xfrm>
-            <a:off x="2591410" y="1784717"/>
+            <a:off x="2630272" y="1717406"/>
             <a:ext cx="548640" cy="365760"/>
           </a:xfrm>
           <a:prstGeom prst="rect">
@@ -37952,7 +37952,7 @@
         </p:nvSpPr>
         <p:spPr>
           <a:xfrm>
-            <a:off x="3012454" y="2205761"/>
+            <a:off x="3079765" y="2166899"/>
             <a:ext cx="548640" cy="365760"/>
           </a:xfrm>
           <a:prstGeom prst="rect">
@@ -37991,7 +37991,7 @@
         </p:nvSpPr>
         <p:spPr>
           <a:xfrm>
-            <a:off x="3166567" y="2780919"/>
+            <a:off x="3244291" y="2780919"/>
             <a:ext cx="548640" cy="365760"/>
           </a:xfrm>
           <a:prstGeom prst="rect">
@@ -38030,7 +38030,7 @@
         </p:nvSpPr>
         <p:spPr>
           <a:xfrm>
-            <a:off x="3012454" y="3356077"/>
+            <a:off x="3079765" y="3394939"/>
             <a:ext cx="548640" cy="365760"/>
           </a:xfrm>
           <a:prstGeom prst="rect">
@@ -38069,7 +38069,7 @@
         </p:nvSpPr>
         <p:spPr>
           <a:xfrm>
-            <a:off x="2591410" y="3777121"/>
+            <a:off x="2630272" y="3844432"/>
             <a:ext cx="548640" cy="365760"/>
           </a:xfrm>
           <a:prstGeom prst="rect">
@@ -38108,7 +38108,7 @@
         </p:nvSpPr>
         <p:spPr>
           <a:xfrm>
-            <a:off x="2016252" y="3931234"/>
+            <a:off x="2016252" y="4008958"/>
             <a:ext cx="548640" cy="365760"/>
           </a:xfrm>
           <a:prstGeom prst="rect">
@@ -38147,7 +38147,7 @@
         </p:nvSpPr>
         <p:spPr>
           <a:xfrm>
-            <a:off x="1441094" y="3777121"/>
+            <a:off x="1402232" y="3844432"/>
             <a:ext cx="548640" cy="365760"/>
           </a:xfrm>
           <a:prstGeom prst="rect">
@@ -38186,7 +38186,7 @@
         </p:nvSpPr>
         <p:spPr>
           <a:xfrm>
-            <a:off x="1020050" y="3356077"/>
+            <a:off x="952739" y="3394939"/>
             <a:ext cx="548640" cy="365760"/>
           </a:xfrm>
           <a:prstGeom prst="rect">
@@ -38225,7 +38225,7 @@
         </p:nvSpPr>
         <p:spPr>
           <a:xfrm>
-            <a:off x="865937" y="2780919"/>
+            <a:off x="788213" y="2780919"/>
             <a:ext cx="548640" cy="365760"/>
           </a:xfrm>
           <a:prstGeom prst="rect">
@@ -38264,7 +38264,7 @@
         </p:nvSpPr>
         <p:spPr>
           <a:xfrm>
-            <a:off x="1020050" y="2205761"/>
+            <a:off x="952739" y="2166899"/>
             <a:ext cx="548640" cy="365760"/>
           </a:xfrm>
           <a:prstGeom prst="rect">
@@ -38303,7 +38303,7 @@
         </p:nvSpPr>
         <p:spPr>
           <a:xfrm>
-            <a:off x="1441094" y="1784717"/>
+            <a:off x="1402232" y="1717406"/>
             <a:ext cx="548640" cy="365760"/>
           </a:xfrm>
           <a:prstGeom prst="rect">
@@ -38342,7 +38342,7 @@
         </p:nvSpPr>
         <p:spPr>
           <a:xfrm>
-            <a:off x="2016252" y="1630604"/>
+            <a:off x="2016252" y="1552880"/>
             <a:ext cx="548640" cy="365760"/>
           </a:xfrm>
           <a:prstGeom prst="rect">
@@ -38381,8 +38381,8 @@
         </p:nvSpPr>
         <p:spPr>
           <a:xfrm flipH="1">
-            <a:off x="1513332" y="2963799"/>
-            <a:ext cx="777240" cy="0"/>
+            <a:off x="1606601" y="2963799"/>
+            <a:ext cx="683971" cy="0"/>
           </a:xfrm>
           <a:prstGeom prst="line">
             <a:avLst/>
@@ -38404,8 +38404,8 @@
         </p:nvSpPr>
         <p:spPr>
           <a:xfrm flipV="1">
-            <a:off x="2290572" y="1751305"/>
-            <a:ext cx="0" cy="1212494"/>
+            <a:off x="2290572" y="1968932"/>
+            <a:ext cx="0" cy="994867"/>
           </a:xfrm>
           <a:prstGeom prst="line">
             <a:avLst/>
@@ -39896,7 +39896,7 @@
         </p:nvSpPr>
         <p:spPr>
           <a:xfrm>
-            <a:off x="6395314" y="1784717"/>
+            <a:off x="6434176" y="1717406"/>
             <a:ext cx="548640" cy="365760"/>
           </a:xfrm>
           <a:prstGeom prst="rect">
@@ -39935,7 +39935,7 @@
         </p:nvSpPr>
         <p:spPr>
           <a:xfrm>
-            <a:off x="6816358" y="2205761"/>
+            <a:off x="6883669" y="2166899"/>
             <a:ext cx="548640" cy="365760"/>
           </a:xfrm>
           <a:prstGeom prst="rect">
@@ -39974,7 +39974,7 @@
         </p:nvSpPr>
         <p:spPr>
           <a:xfrm>
-            <a:off x="6970471" y="2780919"/>
+            <a:off x="7048195" y="2780919"/>
             <a:ext cx="548640" cy="365760"/>
           </a:xfrm>
           <a:prstGeom prst="rect">
@@ -40013,7 +40013,7 @@
         </p:nvSpPr>
         <p:spPr>
           <a:xfrm>
-            <a:off x="6816358" y="3356077"/>
+            <a:off x="6883669" y="3394939"/>
             <a:ext cx="548640" cy="365760"/>
           </a:xfrm>
           <a:prstGeom prst="rect">
@@ -40052,7 +40052,7 @@
         </p:nvSpPr>
         <p:spPr>
           <a:xfrm>
-            <a:off x="6395314" y="3777121"/>
+            <a:off x="6434176" y="3844432"/>
             <a:ext cx="548640" cy="365760"/>
           </a:xfrm>
           <a:prstGeom prst="rect">
@@ -40091,7 +40091,7 @@
         </p:nvSpPr>
         <p:spPr>
           <a:xfrm>
-            <a:off x="5820156" y="3931234"/>
+            <a:off x="5820156" y="4008958"/>
             <a:ext cx="548640" cy="365760"/>
           </a:xfrm>
           <a:prstGeom prst="rect">
@@ -40130,7 +40130,7 @@
         </p:nvSpPr>
         <p:spPr>
           <a:xfrm>
-            <a:off x="5244998" y="3777121"/>
+            <a:off x="5206136" y="3844432"/>
             <a:ext cx="548640" cy="365760"/>
           </a:xfrm>
           <a:prstGeom prst="rect">
@@ -40169,7 +40169,7 @@
         </p:nvSpPr>
         <p:spPr>
           <a:xfrm>
-            <a:off x="4823954" y="3356077"/>
+            <a:off x="4756643" y="3394939"/>
             <a:ext cx="548640" cy="365760"/>
           </a:xfrm>
           <a:prstGeom prst="rect">
@@ -40208,7 +40208,7 @@
         </p:nvSpPr>
         <p:spPr>
           <a:xfrm>
-            <a:off x="4669841" y="2780919"/>
+            <a:off x="4592117" y="2780919"/>
             <a:ext cx="548640" cy="365760"/>
           </a:xfrm>
           <a:prstGeom prst="rect">
@@ -40247,7 +40247,7 @@
         </p:nvSpPr>
         <p:spPr>
           <a:xfrm>
-            <a:off x="4823954" y="2205761"/>
+            <a:off x="4756643" y="2166899"/>
             <a:ext cx="548640" cy="365760"/>
           </a:xfrm>
           <a:prstGeom prst="rect">
@@ -40286,7 +40286,7 @@
         </p:nvSpPr>
         <p:spPr>
           <a:xfrm>
-            <a:off x="5244998" y="1784717"/>
+            <a:off x="5206136" y="1717406"/>
             <a:ext cx="548640" cy="365760"/>
           </a:xfrm>
           <a:prstGeom prst="rect">
@@ -40325,7 +40325,7 @@
         </p:nvSpPr>
         <p:spPr>
           <a:xfrm>
-            <a:off x="5820156" y="1630604"/>
+            <a:off x="5820156" y="1552880"/>
             <a:ext cx="548640" cy="365760"/>
           </a:xfrm>
           <a:prstGeom prst="rect">
@@ -40364,8 +40364,8 @@
         </p:nvSpPr>
         <p:spPr>
           <a:xfrm flipV="1">
-            <a:off x="6094476" y="2575179"/>
-            <a:ext cx="673110" cy="388620"/>
+            <a:off x="6094476" y="2621813"/>
+            <a:ext cx="592336" cy="341986"/>
           </a:xfrm>
           <a:prstGeom prst="line">
             <a:avLst/>
@@ -40387,8 +40387,8 @@
         </p:nvSpPr>
         <p:spPr>
           <a:xfrm flipV="1">
-            <a:off x="6094476" y="1751305"/>
-            <a:ext cx="0" cy="1212494"/>
+            <a:off x="6094476" y="1968932"/>
+            <a:ext cx="0" cy="994867"/>
           </a:xfrm>
           <a:prstGeom prst="line">
             <a:avLst/>
@@ -41879,7 +41879,7 @@
         </p:nvSpPr>
         <p:spPr>
           <a:xfrm>
-            <a:off x="10199218" y="1784717"/>
+            <a:off x="10238080" y="1717406"/>
             <a:ext cx="548640" cy="365760"/>
           </a:xfrm>
           <a:prstGeom prst="rect">
@@ -41918,7 +41918,7 @@
         </p:nvSpPr>
         <p:spPr>
           <a:xfrm>
-            <a:off x="10620262" y="2205761"/>
+            <a:off x="10687573" y="2166899"/>
             <a:ext cx="548640" cy="365760"/>
           </a:xfrm>
           <a:prstGeom prst="rect">
@@ -41957,7 +41957,7 @@
         </p:nvSpPr>
         <p:spPr>
           <a:xfrm>
-            <a:off x="10774375" y="2780919"/>
+            <a:off x="10852099" y="2780919"/>
             <a:ext cx="548640" cy="365760"/>
           </a:xfrm>
           <a:prstGeom prst="rect">
@@ -41996,7 +41996,7 @@
         </p:nvSpPr>
         <p:spPr>
           <a:xfrm>
-            <a:off x="10620262" y="3356077"/>
+            <a:off x="10687573" y="3394939"/>
             <a:ext cx="548640" cy="365760"/>
           </a:xfrm>
           <a:prstGeom prst="rect">
@@ -42035,7 +42035,7 @@
         </p:nvSpPr>
         <p:spPr>
           <a:xfrm>
-            <a:off x="10199218" y="3777121"/>
+            <a:off x="10238080" y="3844432"/>
             <a:ext cx="548640" cy="365760"/>
           </a:xfrm>
           <a:prstGeom prst="rect">
@@ -42074,7 +42074,7 @@
         </p:nvSpPr>
         <p:spPr>
           <a:xfrm>
-            <a:off x="9624060" y="3931234"/>
+            <a:off x="9624060" y="4008958"/>
             <a:ext cx="548640" cy="365760"/>
           </a:xfrm>
           <a:prstGeom prst="rect">
@@ -42113,7 +42113,7 @@
         </p:nvSpPr>
         <p:spPr>
           <a:xfrm>
-            <a:off x="9048902" y="3777121"/>
+            <a:off x="9010040" y="3844432"/>
             <a:ext cx="548640" cy="365760"/>
           </a:xfrm>
           <a:prstGeom prst="rect">
@@ -42152,7 +42152,7 @@
         </p:nvSpPr>
         <p:spPr>
           <a:xfrm>
-            <a:off x="8627858" y="3356077"/>
+            <a:off x="8560547" y="3394939"/>
             <a:ext cx="548640" cy="365760"/>
           </a:xfrm>
           <a:prstGeom prst="rect">
@@ -42191,7 +42191,7 @@
         </p:nvSpPr>
         <p:spPr>
           <a:xfrm>
-            <a:off x="8473745" y="2780919"/>
+            <a:off x="8396021" y="2780919"/>
             <a:ext cx="548640" cy="365760"/>
           </a:xfrm>
           <a:prstGeom prst="rect">
@@ -42230,7 +42230,7 @@
         </p:nvSpPr>
         <p:spPr>
           <a:xfrm>
-            <a:off x="8627858" y="2205761"/>
+            <a:off x="8560547" y="2166899"/>
             <a:ext cx="548640" cy="365760"/>
           </a:xfrm>
           <a:prstGeom prst="rect">
@@ -42269,7 +42269,7 @@
         </p:nvSpPr>
         <p:spPr>
           <a:xfrm>
-            <a:off x="9048902" y="1784717"/>
+            <a:off x="9010040" y="1717406"/>
             <a:ext cx="548640" cy="365760"/>
           </a:xfrm>
           <a:prstGeom prst="rect">
@@ -42308,7 +42308,7 @@
         </p:nvSpPr>
         <p:spPr>
           <a:xfrm>
-            <a:off x="9624060" y="1630604"/>
+            <a:off x="9624060" y="1552880"/>
             <a:ext cx="548640" cy="365760"/>
           </a:xfrm>
           <a:prstGeom prst="rect">
@@ -42347,8 +42347,8 @@
         </p:nvSpPr>
         <p:spPr>
           <a:xfrm flipV="1">
-            <a:off x="9898380" y="2186559"/>
-            <a:ext cx="0" cy="777240"/>
+            <a:off x="9898380" y="2279828"/>
+            <a:ext cx="0" cy="683971"/>
           </a:xfrm>
           <a:prstGeom prst="line">
             <a:avLst/>
@@ -42370,8 +42370,8 @@
         </p:nvSpPr>
         <p:spPr>
           <a:xfrm flipV="1">
-            <a:off x="9898380" y="1751305"/>
-            <a:ext cx="0" cy="1212494"/>
+            <a:off x="9898380" y="1968932"/>
+            <a:ext cx="0" cy="994867"/>
           </a:xfrm>
           <a:prstGeom prst="line">
             <a:avLst/>
@@ -44045,7 +44045,7 @@
         </p:nvSpPr>
         <p:spPr>
           <a:xfrm>
-            <a:off x="3530956" y="2044178"/>
+            <a:off x="3569818" y="1976867"/>
             <a:ext cx="548640" cy="365760"/>
           </a:xfrm>
           <a:prstGeom prst="rect">
@@ -44084,7 +44084,7 @@
         </p:nvSpPr>
         <p:spPr>
           <a:xfrm>
-            <a:off x="3952000" y="2465222"/>
+            <a:off x="4019311" y="2426360"/>
             <a:ext cx="548640" cy="365760"/>
           </a:xfrm>
           <a:prstGeom prst="rect">
@@ -44123,7 +44123,7 @@
         </p:nvSpPr>
         <p:spPr>
           <a:xfrm>
-            <a:off x="4106113" y="3040380"/>
+            <a:off x="4183837" y="3040380"/>
             <a:ext cx="548640" cy="365760"/>
           </a:xfrm>
           <a:prstGeom prst="rect">
@@ -44162,7 +44162,7 @@
         </p:nvSpPr>
         <p:spPr>
           <a:xfrm>
-            <a:off x="3952000" y="3615538"/>
+            <a:off x="4019311" y="3654400"/>
             <a:ext cx="548640" cy="365760"/>
           </a:xfrm>
           <a:prstGeom prst="rect">
@@ -44201,7 +44201,7 @@
         </p:nvSpPr>
         <p:spPr>
           <a:xfrm>
-            <a:off x="3530956" y="4036582"/>
+            <a:off x="3569818" y="4103893"/>
             <a:ext cx="548640" cy="365760"/>
           </a:xfrm>
           <a:prstGeom prst="rect">
@@ -44240,7 +44240,7 @@
         </p:nvSpPr>
         <p:spPr>
           <a:xfrm>
-            <a:off x="2955798" y="4190695"/>
+            <a:off x="2955798" y="4268419"/>
             <a:ext cx="548640" cy="365760"/>
           </a:xfrm>
           <a:prstGeom prst="rect">
@@ -44279,7 +44279,7 @@
         </p:nvSpPr>
         <p:spPr>
           <a:xfrm>
-            <a:off x="2380640" y="4036582"/>
+            <a:off x="2341778" y="4103893"/>
             <a:ext cx="548640" cy="365760"/>
           </a:xfrm>
           <a:prstGeom prst="rect">
@@ -44318,7 +44318,7 @@
         </p:nvSpPr>
         <p:spPr>
           <a:xfrm>
-            <a:off x="1959596" y="3615538"/>
+            <a:off x="1892285" y="3654400"/>
             <a:ext cx="548640" cy="365760"/>
           </a:xfrm>
           <a:prstGeom prst="rect">
@@ -44357,7 +44357,7 @@
         </p:nvSpPr>
         <p:spPr>
           <a:xfrm>
-            <a:off x="1805483" y="3040380"/>
+            <a:off x="1727759" y="3040380"/>
             <a:ext cx="548640" cy="365760"/>
           </a:xfrm>
           <a:prstGeom prst="rect">
@@ -44396,7 +44396,7 @@
         </p:nvSpPr>
         <p:spPr>
           <a:xfrm>
-            <a:off x="1959596" y="2465222"/>
+            <a:off x="1892285" y="2426360"/>
             <a:ext cx="548640" cy="365760"/>
           </a:xfrm>
           <a:prstGeom prst="rect">
@@ -44435,7 +44435,7 @@
         </p:nvSpPr>
         <p:spPr>
           <a:xfrm>
-            <a:off x="2380640" y="2044178"/>
+            <a:off x="2341778" y="1976867"/>
             <a:ext cx="548640" cy="365760"/>
           </a:xfrm>
           <a:prstGeom prst="rect">
@@ -44474,7 +44474,7 @@
         </p:nvSpPr>
         <p:spPr>
           <a:xfrm>
-            <a:off x="2955798" y="1890065"/>
+            <a:off x="2955798" y="1812341"/>
             <a:ext cx="548640" cy="365760"/>
           </a:xfrm>
           <a:prstGeom prst="rect">
@@ -44514,7 +44514,7 @@
         <p:spPr>
           <a:xfrm>
             <a:off x="3230118" y="3223260"/>
-            <a:ext cx="750756" cy="201165"/>
+            <a:ext cx="660665" cy="177025"/>
           </a:xfrm>
           <a:prstGeom prst="line">
             <a:avLst/>
@@ -44537,7 +44537,7 @@
         <p:spPr>
           <a:xfrm>
             <a:off x="3230118" y="3223260"/>
-            <a:ext cx="0" cy="1212494"/>
+            <a:ext cx="0" cy="994867"/>
           </a:xfrm>
           <a:prstGeom prst="line">
             <a:avLst/>
@@ -46350,7 +46350,7 @@
         </p:nvSpPr>
         <p:spPr>
           <a:xfrm>
-            <a:off x="2591410" y="1784717"/>
+            <a:off x="2630272" y="1717406"/>
             <a:ext cx="548640" cy="365760"/>
           </a:xfrm>
           <a:prstGeom prst="rect">
@@ -46389,7 +46389,7 @@
         </p:nvSpPr>
         <p:spPr>
           <a:xfrm>
-            <a:off x="3012454" y="2205761"/>
+            <a:off x="3079765" y="2166899"/>
             <a:ext cx="548640" cy="365760"/>
           </a:xfrm>
           <a:prstGeom prst="rect">
@@ -46428,7 +46428,7 @@
         </p:nvSpPr>
         <p:spPr>
           <a:xfrm>
-            <a:off x="3166567" y="2780919"/>
+            <a:off x="3244291" y="2780919"/>
             <a:ext cx="548640" cy="365760"/>
           </a:xfrm>
           <a:prstGeom prst="rect">
@@ -46467,7 +46467,7 @@
         </p:nvSpPr>
         <p:spPr>
           <a:xfrm>
-            <a:off x="3012454" y="3356077"/>
+            <a:off x="3079765" y="3394939"/>
             <a:ext cx="548640" cy="365760"/>
           </a:xfrm>
           <a:prstGeom prst="rect">
@@ -46506,7 +46506,7 @@
         </p:nvSpPr>
         <p:spPr>
           <a:xfrm>
-            <a:off x="2591410" y="3777121"/>
+            <a:off x="2630272" y="3844432"/>
             <a:ext cx="548640" cy="365760"/>
           </a:xfrm>
           <a:prstGeom prst="rect">
@@ -46545,7 +46545,7 @@
         </p:nvSpPr>
         <p:spPr>
           <a:xfrm>
-            <a:off x="2016252" y="3931234"/>
+            <a:off x="2016252" y="4008958"/>
             <a:ext cx="548640" cy="365760"/>
           </a:xfrm>
           <a:prstGeom prst="rect">
@@ -46584,7 +46584,7 @@
         </p:nvSpPr>
         <p:spPr>
           <a:xfrm>
-            <a:off x="1441094" y="3777121"/>
+            <a:off x="1402232" y="3844432"/>
             <a:ext cx="548640" cy="365760"/>
           </a:xfrm>
           <a:prstGeom prst="rect">
@@ -46623,7 +46623,7 @@
         </p:nvSpPr>
         <p:spPr>
           <a:xfrm>
-            <a:off x="1020050" y="3356077"/>
+            <a:off x="952739" y="3394939"/>
             <a:ext cx="548640" cy="365760"/>
           </a:xfrm>
           <a:prstGeom prst="rect">
@@ -46662,7 +46662,7 @@
         </p:nvSpPr>
         <p:spPr>
           <a:xfrm>
-            <a:off x="865937" y="2780919"/>
+            <a:off x="788213" y="2780919"/>
             <a:ext cx="548640" cy="365760"/>
           </a:xfrm>
           <a:prstGeom prst="rect">
@@ -46701,7 +46701,7 @@
         </p:nvSpPr>
         <p:spPr>
           <a:xfrm>
-            <a:off x="1020050" y="2205761"/>
+            <a:off x="952739" y="2166899"/>
             <a:ext cx="548640" cy="365760"/>
           </a:xfrm>
           <a:prstGeom prst="rect">
@@ -46740,7 +46740,7 @@
         </p:nvSpPr>
         <p:spPr>
           <a:xfrm>
-            <a:off x="1441094" y="1784717"/>
+            <a:off x="1402232" y="1717406"/>
             <a:ext cx="548640" cy="365760"/>
           </a:xfrm>
           <a:prstGeom prst="rect">
@@ -46779,7 +46779,7 @@
         </p:nvSpPr>
         <p:spPr>
           <a:xfrm>
-            <a:off x="2016252" y="1630604"/>
+            <a:off x="2016252" y="1552880"/>
             <a:ext cx="548640" cy="365760"/>
           </a:xfrm>
           <a:prstGeom prst="rect">
@@ -46819,7 +46819,7 @@
         <p:spPr>
           <a:xfrm>
             <a:off x="2290572" y="2963799"/>
-            <a:ext cx="777240" cy="0"/>
+            <a:ext cx="683971" cy="0"/>
           </a:xfrm>
           <a:prstGeom prst="line">
             <a:avLst/>
@@ -46841,8 +46841,8 @@
         </p:nvSpPr>
         <p:spPr>
           <a:xfrm flipV="1">
-            <a:off x="2290572" y="1751305"/>
-            <a:ext cx="0" cy="1212494"/>
+            <a:off x="2290572" y="1968932"/>
+            <a:ext cx="0" cy="994867"/>
           </a:xfrm>
           <a:prstGeom prst="line">
             <a:avLst/>
@@ -48333,7 +48333,7 @@
         </p:nvSpPr>
         <p:spPr>
           <a:xfrm>
-            <a:off x="6395314" y="1784717"/>
+            <a:off x="6434176" y="1717406"/>
             <a:ext cx="548640" cy="365760"/>
           </a:xfrm>
           <a:prstGeom prst="rect">
@@ -48372,7 +48372,7 @@
         </p:nvSpPr>
         <p:spPr>
           <a:xfrm>
-            <a:off x="6816358" y="2205761"/>
+            <a:off x="6883669" y="2166899"/>
             <a:ext cx="548640" cy="365760"/>
           </a:xfrm>
           <a:prstGeom prst="rect">
@@ -48411,7 +48411,7 @@
         </p:nvSpPr>
         <p:spPr>
           <a:xfrm>
-            <a:off x="6970471" y="2780919"/>
+            <a:off x="7048195" y="2780919"/>
             <a:ext cx="548640" cy="365760"/>
           </a:xfrm>
           <a:prstGeom prst="rect">
@@ -48450,7 +48450,7 @@
         </p:nvSpPr>
         <p:spPr>
           <a:xfrm>
-            <a:off x="6816358" y="3356077"/>
+            <a:off x="6883669" y="3394939"/>
             <a:ext cx="548640" cy="365760"/>
           </a:xfrm>
           <a:prstGeom prst="rect">
@@ -48489,7 +48489,7 @@
         </p:nvSpPr>
         <p:spPr>
           <a:xfrm>
-            <a:off x="6395314" y="3777121"/>
+            <a:off x="6434176" y="3844432"/>
             <a:ext cx="548640" cy="365760"/>
           </a:xfrm>
           <a:prstGeom prst="rect">
@@ -48528,7 +48528,7 @@
         </p:nvSpPr>
         <p:spPr>
           <a:xfrm>
-            <a:off x="5820156" y="3931234"/>
+            <a:off x="5820156" y="4008958"/>
             <a:ext cx="548640" cy="365760"/>
           </a:xfrm>
           <a:prstGeom prst="rect">
@@ -48567,7 +48567,7 @@
         </p:nvSpPr>
         <p:spPr>
           <a:xfrm>
-            <a:off x="5244998" y="3777121"/>
+            <a:off x="5206136" y="3844432"/>
             <a:ext cx="548640" cy="365760"/>
           </a:xfrm>
           <a:prstGeom prst="rect">
@@ -48606,7 +48606,7 @@
         </p:nvSpPr>
         <p:spPr>
           <a:xfrm>
-            <a:off x="4823954" y="3356077"/>
+            <a:off x="4756643" y="3394939"/>
             <a:ext cx="548640" cy="365760"/>
           </a:xfrm>
           <a:prstGeom prst="rect">
@@ -48645,7 +48645,7 @@
         </p:nvSpPr>
         <p:spPr>
           <a:xfrm>
-            <a:off x="4669841" y="2780919"/>
+            <a:off x="4592117" y="2780919"/>
             <a:ext cx="548640" cy="365760"/>
           </a:xfrm>
           <a:prstGeom prst="rect">
@@ -48684,7 +48684,7 @@
         </p:nvSpPr>
         <p:spPr>
           <a:xfrm>
-            <a:off x="4823954" y="2205761"/>
+            <a:off x="4756643" y="2166899"/>
             <a:ext cx="548640" cy="365760"/>
           </a:xfrm>
           <a:prstGeom prst="rect">
@@ -48723,7 +48723,7 @@
         </p:nvSpPr>
         <p:spPr>
           <a:xfrm>
-            <a:off x="5244998" y="1784717"/>
+            <a:off x="5206136" y="1717406"/>
             <a:ext cx="548640" cy="365760"/>
           </a:xfrm>
           <a:prstGeom prst="rect">
@@ -48762,7 +48762,7 @@
         </p:nvSpPr>
         <p:spPr>
           <a:xfrm>
-            <a:off x="5820156" y="1630604"/>
+            <a:off x="5820156" y="1552880"/>
             <a:ext cx="548640" cy="365760"/>
           </a:xfrm>
           <a:prstGeom prst="rect">
@@ -48802,7 +48802,7 @@
         <p:spPr>
           <a:xfrm>
             <a:off x="6094476" y="2963799"/>
-            <a:ext cx="750756" cy="201165"/>
+            <a:ext cx="660665" cy="177025"/>
           </a:xfrm>
           <a:prstGeom prst="line">
             <a:avLst/>
@@ -48825,7 +48825,7 @@
         <p:spPr>
           <a:xfrm>
             <a:off x="6094476" y="2963799"/>
-            <a:ext cx="0" cy="1212494"/>
+            <a:ext cx="0" cy="994867"/>
           </a:xfrm>
           <a:prstGeom prst="line">
             <a:avLst/>
@@ -50316,7 +50316,7 @@
         </p:nvSpPr>
         <p:spPr>
           <a:xfrm>
-            <a:off x="10199218" y="1784717"/>
+            <a:off x="10238080" y="1717406"/>
             <a:ext cx="548640" cy="365760"/>
           </a:xfrm>
           <a:prstGeom prst="rect">
@@ -50355,7 +50355,7 @@
         </p:nvSpPr>
         <p:spPr>
           <a:xfrm>
-            <a:off x="10620262" y="2205761"/>
+            <a:off x="10687573" y="2166899"/>
             <a:ext cx="548640" cy="365760"/>
           </a:xfrm>
           <a:prstGeom prst="rect">
@@ -50394,7 +50394,7 @@
         </p:nvSpPr>
         <p:spPr>
           <a:xfrm>
-            <a:off x="10774375" y="2780919"/>
+            <a:off x="10852099" y="2780919"/>
             <a:ext cx="548640" cy="365760"/>
           </a:xfrm>
           <a:prstGeom prst="rect">
@@ -50433,7 +50433,7 @@
         </p:nvSpPr>
         <p:spPr>
           <a:xfrm>
-            <a:off x="10620262" y="3356077"/>
+            <a:off x="10687573" y="3394939"/>
             <a:ext cx="548640" cy="365760"/>
           </a:xfrm>
           <a:prstGeom prst="rect">
@@ -50472,7 +50472,7 @@
         </p:nvSpPr>
         <p:spPr>
           <a:xfrm>
-            <a:off x="10199218" y="3777121"/>
+            <a:off x="10238080" y="3844432"/>
             <a:ext cx="548640" cy="365760"/>
           </a:xfrm>
           <a:prstGeom prst="rect">
@@ -50511,7 +50511,7 @@
         </p:nvSpPr>
         <p:spPr>
           <a:xfrm>
-            <a:off x="9624060" y="3931234"/>
+            <a:off x="9624060" y="4008958"/>
             <a:ext cx="548640" cy="365760"/>
           </a:xfrm>
           <a:prstGeom prst="rect">
@@ -50550,7 +50550,7 @@
         </p:nvSpPr>
         <p:spPr>
           <a:xfrm>
-            <a:off x="9048902" y="3777121"/>
+            <a:off x="9010040" y="3844432"/>
             <a:ext cx="548640" cy="365760"/>
           </a:xfrm>
           <a:prstGeom prst="rect">
@@ -50589,7 +50589,7 @@
         </p:nvSpPr>
         <p:spPr>
           <a:xfrm>
-            <a:off x="8627858" y="3356077"/>
+            <a:off x="8560547" y="3394939"/>
             <a:ext cx="548640" cy="365760"/>
           </a:xfrm>
           <a:prstGeom prst="rect">
@@ -50628,7 +50628,7 @@
         </p:nvSpPr>
         <p:spPr>
           <a:xfrm>
-            <a:off x="8473745" y="2780919"/>
+            <a:off x="8396021" y="2780919"/>
             <a:ext cx="548640" cy="365760"/>
           </a:xfrm>
           <a:prstGeom prst="rect">
@@ -50667,7 +50667,7 @@
         </p:nvSpPr>
         <p:spPr>
           <a:xfrm>
-            <a:off x="8627858" y="2205761"/>
+            <a:off x="8560547" y="2166899"/>
             <a:ext cx="548640" cy="365760"/>
           </a:xfrm>
           <a:prstGeom prst="rect">
@@ -50706,7 +50706,7 @@
         </p:nvSpPr>
         <p:spPr>
           <a:xfrm>
-            <a:off x="9048902" y="1784717"/>
+            <a:off x="9010040" y="1717406"/>
             <a:ext cx="548640" cy="365760"/>
           </a:xfrm>
           <a:prstGeom prst="rect">
@@ -50745,7 +50745,7 @@
         </p:nvSpPr>
         <p:spPr>
           <a:xfrm>
-            <a:off x="9624060" y="1630604"/>
+            <a:off x="9624060" y="1552880"/>
             <a:ext cx="548640" cy="365760"/>
           </a:xfrm>
           <a:prstGeom prst="rect">
@@ -50785,7 +50785,7 @@
         <p:spPr>
           <a:xfrm>
             <a:off x="9898380" y="2963799"/>
-            <a:ext cx="673110" cy="388620"/>
+            <a:ext cx="592336" cy="341986"/>
           </a:xfrm>
           <a:prstGeom prst="line">
             <a:avLst/>
@@ -50807,8 +50807,8 @@
         </p:nvSpPr>
         <p:spPr>
           <a:xfrm flipV="1">
-            <a:off x="9898380" y="1751305"/>
-            <a:ext cx="0" cy="1212494"/>
+            <a:off x="9898380" y="1968932"/>
+            <a:ext cx="0" cy="994867"/>
           </a:xfrm>
           <a:prstGeom prst="line">
             <a:avLst/>
@@ -52452,7 +52452,7 @@
         </p:nvSpPr>
         <p:spPr>
           <a:xfrm>
-            <a:off x="9581449" y="3232898"/>
+            <a:off x="9620311" y="3165587"/>
             <a:ext cx="548640" cy="365760"/>
           </a:xfrm>
           <a:prstGeom prst="rect">
@@ -52491,7 +52491,7 @@
         </p:nvSpPr>
         <p:spPr>
           <a:xfrm>
-            <a:off x="10002494" y="3653942"/>
+            <a:off x="10069805" y="3615080"/>
             <a:ext cx="548640" cy="365760"/>
           </a:xfrm>
           <a:prstGeom prst="rect">
@@ -52530,7 +52530,7 @@
         </p:nvSpPr>
         <p:spPr>
           <a:xfrm>
-            <a:off x="10156607" y="4229100"/>
+            <a:off x="10234331" y="4229100"/>
             <a:ext cx="548640" cy="365760"/>
           </a:xfrm>
           <a:prstGeom prst="rect">
@@ -52569,7 +52569,7 @@
         </p:nvSpPr>
         <p:spPr>
           <a:xfrm>
-            <a:off x="10002494" y="4804258"/>
+            <a:off x="10069805" y="4843120"/>
             <a:ext cx="548640" cy="365760"/>
           </a:xfrm>
           <a:prstGeom prst="rect">
@@ -52608,7 +52608,7 @@
         </p:nvSpPr>
         <p:spPr>
           <a:xfrm>
-            <a:off x="9581449" y="5225302"/>
+            <a:off x="9620311" y="5292613"/>
             <a:ext cx="548640" cy="365760"/>
           </a:xfrm>
           <a:prstGeom prst="rect">
@@ -52647,7 +52647,7 @@
         </p:nvSpPr>
         <p:spPr>
           <a:xfrm>
-            <a:off x="9006291" y="5379415"/>
+            <a:off x="9006291" y="5457139"/>
             <a:ext cx="548640" cy="365760"/>
           </a:xfrm>
           <a:prstGeom prst="rect">
@@ -52686,7 +52686,7 @@
         </p:nvSpPr>
         <p:spPr>
           <a:xfrm>
-            <a:off x="8431134" y="5225302"/>
+            <a:off x="8392272" y="5292613"/>
             <a:ext cx="548640" cy="365760"/>
           </a:xfrm>
           <a:prstGeom prst="rect">
@@ -52725,7 +52725,7 @@
         </p:nvSpPr>
         <p:spPr>
           <a:xfrm>
-            <a:off x="8010089" y="4804258"/>
+            <a:off x="7942778" y="4843120"/>
             <a:ext cx="548640" cy="365760"/>
           </a:xfrm>
           <a:prstGeom prst="rect">
@@ -52764,7 +52764,7 @@
         </p:nvSpPr>
         <p:spPr>
           <a:xfrm>
-            <a:off x="7855976" y="4229100"/>
+            <a:off x="7778252" y="4229100"/>
             <a:ext cx="548640" cy="365760"/>
           </a:xfrm>
           <a:prstGeom prst="rect">
@@ -52803,7 +52803,7 @@
         </p:nvSpPr>
         <p:spPr>
           <a:xfrm>
-            <a:off x="8010089" y="3653942"/>
+            <a:off x="7942778" y="3615080"/>
             <a:ext cx="548640" cy="365760"/>
           </a:xfrm>
           <a:prstGeom prst="rect">
@@ -52842,7 +52842,7 @@
         </p:nvSpPr>
         <p:spPr>
           <a:xfrm>
-            <a:off x="8431134" y="3232898"/>
+            <a:off x="8392272" y="3165587"/>
             <a:ext cx="548640" cy="365760"/>
           </a:xfrm>
           <a:prstGeom prst="rect">
@@ -52881,7 +52881,7 @@
         </p:nvSpPr>
         <p:spPr>
           <a:xfrm>
-            <a:off x="9006291" y="3078785"/>
+            <a:off x="9006291" y="3001061"/>
             <a:ext cx="548640" cy="365760"/>
           </a:xfrm>
           <a:prstGeom prst="rect">
@@ -52920,8 +52920,8 @@
         </p:nvSpPr>
         <p:spPr>
           <a:xfrm flipH="1">
-            <a:off x="8731020" y="4411980"/>
-            <a:ext cx="549592" cy="549592"/>
+            <a:off x="8796971" y="4411980"/>
+            <a:ext cx="483641" cy="483641"/>
           </a:xfrm>
           <a:prstGeom prst="line">
             <a:avLst/>
@@ -52944,7 +52944,7 @@
         <p:spPr>
           <a:xfrm>
             <a:off x="9280611" y="4411980"/>
-            <a:ext cx="0" cy="1212494"/>
+            <a:ext cx="0" cy="994867"/>
           </a:xfrm>
           <a:prstGeom prst="line">
             <a:avLst/>

--- a/dist/초1/수학/시간과규칙/초1_수학_시간과규칙_01_몇시와몇시30분.pptx
+++ b/dist/초1/수학/시간과규칙/초1_수학_시간과규칙_01_몇시와몇시30분.pptx
@@ -122,13 +122,13 @@
   <p:extLst>
     <p:ext uri="{521415D9-36F7-43E2-AB2F-B90AF26B5E84}">
       <p14:sectionLst xmlns:p14="http://schemas.microsoft.com/office/powerpoint/2010/main">
-        <p14:section name="도입" id="{e526e992-cd13-44e1-1c40-b5d8831c0e33}">
+        <p14:section name="도입" id="{3114c6f1-2dfc-4d33-f4bd-a9d43f6b473d}">
           <p14:sldIdLst>
             <p14:sldId id="256"/>
             <p14:sldId id="257"/>
           </p14:sldIdLst>
         </p14:section>
-        <p14:section name="개념" id="{9989e8cf-78eb-93a9-b1df-0ee12a04a519}">
+        <p14:section name="개념" id="{4a8e2e30-8805-4483-3881-4cda9eda384b}">
           <p14:sldIdLst>
             <p14:sldId id="258"/>
             <p14:sldId id="259"/>
@@ -138,32 +138,32 @@
             <p14:sldId id="264"/>
           </p14:sldIdLst>
         </p14:section>
-        <p14:section name="연습" id="{a913cb27-f0e2-0330-4517-ea1aa7e44d8e}">
+        <p14:section name="연습" id="{05aaeaa1-18f4-47d1-4381-5994e90852b1}">
           <p14:sldIdLst>
             <p14:sldId id="261"/>
             <p14:sldId id="265"/>
             <p14:sldId id="266"/>
           </p14:sldIdLst>
         </p14:section>
-        <p14:section name="개념" id="{fda562f1-bddc-8c1e-23be-a7c3fb85b5cb}">
+        <p14:section name="개념" id="{d349c001-799a-ded3-de23-c9badd8f9dce}">
           <p14:sldIdLst/>
         </p14:section>
-        <p14:section name="연습" id="{628ae769-c75e-e0a1-6079-ad151084f946}">
+        <p14:section name="연습" id="{f8cecc72-eb4e-ae35-4cb9-15435741bfdb}">
           <p14:sldIdLst/>
         </p14:section>
-        <p14:section name="확인" id="{06d6ffeb-2f5f-c6d9-1966-b2c57370cb90}">
+        <p14:section name="확인" id="{0885ff6d-250b-1410-5c18-b7f1dfd923cd}">
           <p14:sldIdLst>
             <p14:sldId id="267"/>
             <p14:sldId id="268"/>
             <p14:sldId id="269"/>
           </p14:sldIdLst>
         </p14:section>
-        <p14:section name="정리" id="{14ae2dca-9272-8dfd-f957-e8dd2567c565}">
+        <p14:section name="정리" id="{642e1953-7424-c680-8f9f-ccd93cde1247}">
           <p14:sldIdLst>
             <p14:sldId id="270"/>
           </p14:sldIdLst>
         </p14:section>
-        <p14:section name="보충" id="{aec391ef-dcf7-b118-83ea-efece2a88a30}">
+        <p14:section name="보충" id="{f89f4ebd-976c-12cb-524e-37840a4c5466}">
           <p14:sldIdLst>
             <p14:sldId id="271"/>
           </p14:sldIdLst>
@@ -52991,7 +52991,7 @@
         </p:nvSpPr>
         <p:spPr>
           <a:xfrm>
-            <a:off x="548640" y="3559556"/>
+            <a:off x="548640" y="3383788"/>
             <a:ext cx="548640" cy="548640"/>
           </a:xfrm>
           <a:prstGeom prst="ellipse">
@@ -53036,8 +53036,8 @@
         </p:nvSpPr>
         <p:spPr>
           <a:xfrm>
-            <a:off x="1325880" y="3559556"/>
-            <a:ext cx="5229271" cy="548640"/>
+            <a:off x="1325880" y="3338068"/>
+            <a:ext cx="5229271" cy="991616"/>
           </a:xfrm>
           <a:prstGeom prst="rect">
             <a:avLst/>
@@ -53075,7 +53075,7 @@
         </p:nvSpPr>
         <p:spPr>
           <a:xfrm>
-            <a:off x="548640" y="4318508"/>
+            <a:off x="548640" y="4539996"/>
             <a:ext cx="548640" cy="548640"/>
           </a:xfrm>
           <a:prstGeom prst="ellipse">
@@ -53120,7 +53120,7 @@
         </p:nvSpPr>
         <p:spPr>
           <a:xfrm>
-            <a:off x="1325880" y="4272788"/>
+            <a:off x="1325880" y="4494276"/>
             <a:ext cx="5229271" cy="991616"/>
           </a:xfrm>
           <a:prstGeom prst="rect">
